--- a/ppt/AI03-DataScience.pptx
+++ b/ppt/AI03-DataScience.pptx
@@ -5,10 +5,10 @@
     <p:sldMasterId id="2147483653" r:id="rId1"/>
   </p:sldMasterIdLst>
   <p:notesMasterIdLst>
-    <p:notesMasterId r:id="rId45"/>
+    <p:notesMasterId r:id="rId46"/>
   </p:notesMasterIdLst>
   <p:handoutMasterIdLst>
-    <p:handoutMasterId r:id="rId46"/>
+    <p:handoutMasterId r:id="rId47"/>
   </p:handoutMasterIdLst>
   <p:sldIdLst>
     <p:sldId id="264" r:id="rId2"/>
@@ -27,33 +27,34 @@
     <p:sldId id="294" r:id="rId15"/>
     <p:sldId id="295" r:id="rId16"/>
     <p:sldId id="296" r:id="rId17"/>
-    <p:sldId id="297" r:id="rId18"/>
-    <p:sldId id="300" r:id="rId19"/>
-    <p:sldId id="336" r:id="rId20"/>
-    <p:sldId id="314" r:id="rId21"/>
-    <p:sldId id="333" r:id="rId22"/>
-    <p:sldId id="322" r:id="rId23"/>
-    <p:sldId id="340" r:id="rId24"/>
-    <p:sldId id="341" r:id="rId25"/>
-    <p:sldId id="346" r:id="rId26"/>
-    <p:sldId id="347" r:id="rId27"/>
-    <p:sldId id="270" r:id="rId28"/>
-    <p:sldId id="353" r:id="rId29"/>
-    <p:sldId id="354" r:id="rId30"/>
-    <p:sldId id="356" r:id="rId31"/>
-    <p:sldId id="357" r:id="rId32"/>
-    <p:sldId id="358" r:id="rId33"/>
-    <p:sldId id="359" r:id="rId34"/>
-    <p:sldId id="360" r:id="rId35"/>
-    <p:sldId id="369" r:id="rId36"/>
-    <p:sldId id="370" r:id="rId37"/>
-    <p:sldId id="365" r:id="rId38"/>
-    <p:sldId id="366" r:id="rId39"/>
-    <p:sldId id="368" r:id="rId40"/>
-    <p:sldId id="367" r:id="rId41"/>
-    <p:sldId id="371" r:id="rId42"/>
-    <p:sldId id="372" r:id="rId43"/>
-    <p:sldId id="373" r:id="rId44"/>
+    <p:sldId id="374" r:id="rId18"/>
+    <p:sldId id="297" r:id="rId19"/>
+    <p:sldId id="300" r:id="rId20"/>
+    <p:sldId id="336" r:id="rId21"/>
+    <p:sldId id="314" r:id="rId22"/>
+    <p:sldId id="333" r:id="rId23"/>
+    <p:sldId id="322" r:id="rId24"/>
+    <p:sldId id="340" r:id="rId25"/>
+    <p:sldId id="341" r:id="rId26"/>
+    <p:sldId id="346" r:id="rId27"/>
+    <p:sldId id="347" r:id="rId28"/>
+    <p:sldId id="270" r:id="rId29"/>
+    <p:sldId id="353" r:id="rId30"/>
+    <p:sldId id="354" r:id="rId31"/>
+    <p:sldId id="356" r:id="rId32"/>
+    <p:sldId id="357" r:id="rId33"/>
+    <p:sldId id="358" r:id="rId34"/>
+    <p:sldId id="359" r:id="rId35"/>
+    <p:sldId id="360" r:id="rId36"/>
+    <p:sldId id="369" r:id="rId37"/>
+    <p:sldId id="370" r:id="rId38"/>
+    <p:sldId id="365" r:id="rId39"/>
+    <p:sldId id="366" r:id="rId40"/>
+    <p:sldId id="368" r:id="rId41"/>
+    <p:sldId id="367" r:id="rId42"/>
+    <p:sldId id="371" r:id="rId43"/>
+    <p:sldId id="372" r:id="rId44"/>
+    <p:sldId id="373" r:id="rId45"/>
   </p:sldIdLst>
   <p:sldSz cx="9144000" cy="6858000" type="screen4x3"/>
   <p:notesSz cx="6648450" cy="9782175"/>
@@ -4605,6 +4606,134 @@
       </p:grpSpPr>
       <p:sp>
         <p:nvSpPr>
+          <p:cNvPr id="2" name="Titre 1">
+            <a:extLst>
+              <a:ext uri="{FF2B5EF4-FFF2-40B4-BE49-F238E27FC236}">
+                <a16:creationId xmlns:a16="http://schemas.microsoft.com/office/drawing/2014/main" id="{AB9CFF24-02BB-8CB5-A9B2-461E4AB91EF6}"/>
+              </a:ext>
+            </a:extLst>
+          </p:cNvPr>
+          <p:cNvSpPr>
+            <a:spLocks noGrp="1"/>
+          </p:cNvSpPr>
+          <p:nvPr>
+            <p:ph type="title"/>
+          </p:nvPr>
+        </p:nvSpPr>
+        <p:spPr/>
+        <p:txBody>
+          <a:bodyPr/>
+          <a:lstStyle/>
+          <a:p>
+            <a:endParaRPr lang="fr-FR"/>
+          </a:p>
+        </p:txBody>
+      </p:sp>
+      <p:sp>
+        <p:nvSpPr>
+          <p:cNvPr id="3" name="Espace réservé du contenu 2">
+            <a:extLst>
+              <a:ext uri="{FF2B5EF4-FFF2-40B4-BE49-F238E27FC236}">
+                <a16:creationId xmlns:a16="http://schemas.microsoft.com/office/drawing/2014/main" id="{536E5590-C92F-B865-F299-6371E802F630}"/>
+              </a:ext>
+            </a:extLst>
+          </p:cNvPr>
+          <p:cNvSpPr>
+            <a:spLocks noGrp="1"/>
+          </p:cNvSpPr>
+          <p:nvPr>
+            <p:ph idx="1"/>
+          </p:nvPr>
+        </p:nvSpPr>
+        <p:spPr/>
+        <p:txBody>
+          <a:bodyPr/>
+          <a:lstStyle/>
+          <a:p>
+            <a:r>
+              <a:rPr lang="fr-FR" dirty="0"/>
+              <a:t>f(x) = </a:t>
+            </a:r>
+            <a:r>
+              <a:rPr lang="fr-FR" dirty="0" err="1"/>
+              <a:t>ax</a:t>
+            </a:r>
+            <a:r>
+              <a:rPr lang="fr-FR" dirty="0"/>
+              <a:t> + b</a:t>
+            </a:r>
+          </a:p>
+          <a:p>
+            <a:r>
+              <a:rPr lang="fr-FR" dirty="0"/>
+              <a:t>f = modèle = fonction mathématique</a:t>
+            </a:r>
+          </a:p>
+          <a:p>
+            <a:r>
+              <a:rPr lang="fr-FR" dirty="0"/>
+              <a:t>a et b = variables = poids</a:t>
+            </a:r>
+          </a:p>
+          <a:p>
+            <a:endParaRPr lang="fr-FR" dirty="0"/>
+          </a:p>
+          <a:p>
+            <a:r>
+              <a:rPr lang="fr-FR" dirty="0" err="1"/>
+              <a:t>ChatGPT</a:t>
+            </a:r>
+            <a:r>
+              <a:rPr lang="fr-FR" dirty="0"/>
+              <a:t> = fonction mathématique</a:t>
+            </a:r>
+          </a:p>
+          <a:p>
+            <a:r>
+              <a:rPr lang="fr-FR" dirty="0"/>
+              <a:t>GPT 2 = 500 lignes</a:t>
+            </a:r>
+          </a:p>
+          <a:p>
+            <a:r>
+              <a:rPr lang="fr-FR" dirty="0"/>
+              <a:t>GPT 5 = 800B poids</a:t>
+            </a:r>
+          </a:p>
+        </p:txBody>
+      </p:sp>
+    </p:spTree>
+    <p:extLst>
+      <p:ext uri="{BB962C8B-B14F-4D97-AF65-F5344CB8AC3E}">
+        <p14:creationId xmlns:p14="http://schemas.microsoft.com/office/powerpoint/2010/main" val="3485196117"/>
+      </p:ext>
+    </p:extLst>
+  </p:cSld>
+  <p:clrMapOvr>
+    <a:masterClrMapping/>
+  </p:clrMapOvr>
+</p:sld>
+</file>
+
+<file path=ppt/slides/slide18.xml><?xml version="1.0" encoding="utf-8"?>
+<p:sld xmlns:a="http://schemas.openxmlformats.org/drawingml/2006/main" xmlns:r="http://schemas.openxmlformats.org/officeDocument/2006/relationships" xmlns:p="http://schemas.openxmlformats.org/presentationml/2006/main">
+  <p:cSld>
+    <p:spTree>
+      <p:nvGrpSpPr>
+        <p:cNvPr id="1" name=""/>
+        <p:cNvGrpSpPr/>
+        <p:nvPr/>
+      </p:nvGrpSpPr>
+      <p:grpSpPr>
+        <a:xfrm>
+          <a:off x="0" y="0"/>
+          <a:ext cx="0" cy="0"/>
+          <a:chOff x="0" y="0"/>
+          <a:chExt cx="0" cy="0"/>
+        </a:xfrm>
+      </p:grpSpPr>
+      <p:sp>
+        <p:nvSpPr>
           <p:cNvPr id="2" name="Titre 1"/>
           <p:cNvSpPr>
             <a:spLocks noGrp="1"/>
@@ -4729,7 +4858,7 @@
 </p:sld>
 </file>
 
-<file path=ppt/slides/slide18.xml><?xml version="1.0" encoding="utf-8"?>
+<file path=ppt/slides/slide19.xml><?xml version="1.0" encoding="utf-8"?>
 <p:sld xmlns:a="http://schemas.openxmlformats.org/drawingml/2006/main" xmlns:r="http://schemas.openxmlformats.org/officeDocument/2006/relationships" xmlns:p="http://schemas.openxmlformats.org/presentationml/2006/main">
   <p:cSld>
     <p:spTree>
@@ -4840,7 +4969,116 @@
 </p:sld>
 </file>
 
-<file path=ppt/slides/slide19.xml><?xml version="1.0" encoding="utf-8"?>
+<file path=ppt/slides/slide2.xml><?xml version="1.0" encoding="utf-8"?>
+<p:sld xmlns:a="http://schemas.openxmlformats.org/drawingml/2006/main" xmlns:r="http://schemas.openxmlformats.org/officeDocument/2006/relationships" xmlns:p="http://schemas.openxmlformats.org/presentationml/2006/main">
+  <p:cSld>
+    <p:spTree>
+      <p:nvGrpSpPr>
+        <p:cNvPr id="1" name=""/>
+        <p:cNvGrpSpPr/>
+        <p:nvPr/>
+      </p:nvGrpSpPr>
+      <p:grpSpPr>
+        <a:xfrm>
+          <a:off x="0" y="0"/>
+          <a:ext cx="0" cy="0"/>
+          <a:chOff x="0" y="0"/>
+          <a:chExt cx="0" cy="0"/>
+        </a:xfrm>
+      </p:grpSpPr>
+      <p:sp>
+        <p:nvSpPr>
+          <p:cNvPr id="2" name="Titre 1"/>
+          <p:cNvSpPr>
+            <a:spLocks noGrp="1"/>
+          </p:cNvSpPr>
+          <p:nvPr>
+            <p:ph type="title"/>
+          </p:nvPr>
+        </p:nvSpPr>
+        <p:spPr/>
+        <p:txBody>
+          <a:bodyPr/>
+          <a:lstStyle/>
+          <a:p>
+            <a:endParaRPr lang="fr-FR"/>
+          </a:p>
+        </p:txBody>
+      </p:sp>
+      <p:sp>
+        <p:nvSpPr>
+          <p:cNvPr id="3" name="Espace réservé du contenu 2"/>
+          <p:cNvSpPr>
+            <a:spLocks noGrp="1"/>
+          </p:cNvSpPr>
+          <p:nvPr>
+            <p:ph idx="1"/>
+          </p:nvPr>
+        </p:nvSpPr>
+        <p:spPr/>
+        <p:txBody>
+          <a:bodyPr/>
+          <a:lstStyle/>
+          <a:p>
+            <a:endParaRPr lang="fr-FR"/>
+          </a:p>
+        </p:txBody>
+      </p:sp>
+      <p:pic>
+        <p:nvPicPr>
+          <p:cNvPr id="1026" name="Picture 2" descr="Image associÃ©e"/>
+          <p:cNvPicPr>
+            <a:picLocks noChangeAspect="1" noChangeArrowheads="1"/>
+          </p:cNvPicPr>
+          <p:nvPr/>
+        </p:nvPicPr>
+        <p:blipFill>
+          <a:blip r:embed="rId2">
+            <a:extLst>
+              <a:ext uri="{28A0092B-C50C-407E-A947-70E740481C1C}">
+                <a14:useLocalDpi xmlns:a14="http://schemas.microsoft.com/office/drawing/2010/main" val="0"/>
+              </a:ext>
+            </a:extLst>
+          </a:blip>
+          <a:srcRect/>
+          <a:stretch>
+            <a:fillRect/>
+          </a:stretch>
+        </p:blipFill>
+        <p:spPr bwMode="auto">
+          <a:xfrm>
+            <a:off x="954616" y="0"/>
+            <a:ext cx="7215842" cy="6785993"/>
+          </a:xfrm>
+          <a:prstGeom prst="rect">
+            <a:avLst/>
+          </a:prstGeom>
+          <a:noFill/>
+          <a:extLst>
+            <a:ext uri="{909E8E84-426E-40DD-AFC4-6F175D3DCCD1}">
+              <a14:hiddenFill xmlns:a14="http://schemas.microsoft.com/office/drawing/2010/main">
+                <a:solidFill>
+                  <a:srgbClr val="FFFFFF"/>
+                </a:solidFill>
+              </a14:hiddenFill>
+            </a:ext>
+          </a:extLst>
+        </p:spPr>
+      </p:pic>
+    </p:spTree>
+    <p:extLst>
+      <p:ext uri="{BB962C8B-B14F-4D97-AF65-F5344CB8AC3E}">
+        <p14:creationId xmlns:p14="http://schemas.microsoft.com/office/powerpoint/2010/main" val="3559559726"/>
+      </p:ext>
+    </p:extLst>
+  </p:cSld>
+  <p:clrMapOvr>
+    <a:masterClrMapping/>
+  </p:clrMapOvr>
+</p:sld>
+</file>
+
+<file path=ppt/slides/slide20.xml><?xml version="1.0" encoding="utf-8"?>
 <p:sld xmlns:a="http://schemas.openxmlformats.org/drawingml/2006/main" xmlns:r="http://schemas.openxmlformats.org/officeDocument/2006/relationships" xmlns:p="http://schemas.openxmlformats.org/presentationml/2006/main">
   <p:cSld>
     <p:spTree>
@@ -5219,16 +5457,16 @@
           <a:p>
             <a:pPr lvl="1"/>
             <a:r>
-              <a:rPr lang="fr-FR" sz="1800" dirty="0"/>
-              <a:t>Matlab, SAS, </a:t>
-            </a:r>
-            <a:r>
-              <a:rPr lang="fr-FR" sz="1800" dirty="0" err="1"/>
+              <a:rPr lang="fr-FR" sz="2000" dirty="0" err="1"/>
               <a:t>PyTorch</a:t>
             </a:r>
-            <a:r>
-              <a:rPr lang="fr-FR" sz="1800" dirty="0"/>
-              <a:t>, R, …</a:t>
+            <a:endParaRPr lang="fr-FR" sz="2000" dirty="0"/>
+          </a:p>
+          <a:p>
+            <a:pPr lvl="2"/>
+            <a:r>
+              <a:rPr lang="fr-FR" sz="1400" dirty="0"/>
+              <a:t>Facebook</a:t>
             </a:r>
           </a:p>
           <a:p>
@@ -5300,116 +5538,7 @@
 </p:sld>
 </file>
 
-<file path=ppt/slides/slide2.xml><?xml version="1.0" encoding="utf-8"?>
-<p:sld xmlns:a="http://schemas.openxmlformats.org/drawingml/2006/main" xmlns:r="http://schemas.openxmlformats.org/officeDocument/2006/relationships" xmlns:p="http://schemas.openxmlformats.org/presentationml/2006/main">
-  <p:cSld>
-    <p:spTree>
-      <p:nvGrpSpPr>
-        <p:cNvPr id="1" name=""/>
-        <p:cNvGrpSpPr/>
-        <p:nvPr/>
-      </p:nvGrpSpPr>
-      <p:grpSpPr>
-        <a:xfrm>
-          <a:off x="0" y="0"/>
-          <a:ext cx="0" cy="0"/>
-          <a:chOff x="0" y="0"/>
-          <a:chExt cx="0" cy="0"/>
-        </a:xfrm>
-      </p:grpSpPr>
-      <p:sp>
-        <p:nvSpPr>
-          <p:cNvPr id="2" name="Titre 1"/>
-          <p:cNvSpPr>
-            <a:spLocks noGrp="1"/>
-          </p:cNvSpPr>
-          <p:nvPr>
-            <p:ph type="title"/>
-          </p:nvPr>
-        </p:nvSpPr>
-        <p:spPr/>
-        <p:txBody>
-          <a:bodyPr/>
-          <a:lstStyle/>
-          <a:p>
-            <a:endParaRPr lang="fr-FR"/>
-          </a:p>
-        </p:txBody>
-      </p:sp>
-      <p:sp>
-        <p:nvSpPr>
-          <p:cNvPr id="3" name="Espace réservé du contenu 2"/>
-          <p:cNvSpPr>
-            <a:spLocks noGrp="1"/>
-          </p:cNvSpPr>
-          <p:nvPr>
-            <p:ph idx="1"/>
-          </p:nvPr>
-        </p:nvSpPr>
-        <p:spPr/>
-        <p:txBody>
-          <a:bodyPr/>
-          <a:lstStyle/>
-          <a:p>
-            <a:endParaRPr lang="fr-FR"/>
-          </a:p>
-        </p:txBody>
-      </p:sp>
-      <p:pic>
-        <p:nvPicPr>
-          <p:cNvPr id="1026" name="Picture 2" descr="Image associÃ©e"/>
-          <p:cNvPicPr>
-            <a:picLocks noChangeAspect="1" noChangeArrowheads="1"/>
-          </p:cNvPicPr>
-          <p:nvPr/>
-        </p:nvPicPr>
-        <p:blipFill>
-          <a:blip r:embed="rId2">
-            <a:extLst>
-              <a:ext uri="{28A0092B-C50C-407E-A947-70E740481C1C}">
-                <a14:useLocalDpi xmlns:a14="http://schemas.microsoft.com/office/drawing/2010/main" val="0"/>
-              </a:ext>
-            </a:extLst>
-          </a:blip>
-          <a:srcRect/>
-          <a:stretch>
-            <a:fillRect/>
-          </a:stretch>
-        </p:blipFill>
-        <p:spPr bwMode="auto">
-          <a:xfrm>
-            <a:off x="954616" y="0"/>
-            <a:ext cx="7215842" cy="6785993"/>
-          </a:xfrm>
-          <a:prstGeom prst="rect">
-            <a:avLst/>
-          </a:prstGeom>
-          <a:noFill/>
-          <a:extLst>
-            <a:ext uri="{909E8E84-426E-40DD-AFC4-6F175D3DCCD1}">
-              <a14:hiddenFill xmlns:a14="http://schemas.microsoft.com/office/drawing/2010/main">
-                <a:solidFill>
-                  <a:srgbClr val="FFFFFF"/>
-                </a:solidFill>
-              </a14:hiddenFill>
-            </a:ext>
-          </a:extLst>
-        </p:spPr>
-      </p:pic>
-    </p:spTree>
-    <p:extLst>
-      <p:ext uri="{BB962C8B-B14F-4D97-AF65-F5344CB8AC3E}">
-        <p14:creationId xmlns:p14="http://schemas.microsoft.com/office/powerpoint/2010/main" val="3559559726"/>
-      </p:ext>
-    </p:extLst>
-  </p:cSld>
-  <p:clrMapOvr>
-    <a:masterClrMapping/>
-  </p:clrMapOvr>
-</p:sld>
-</file>
-
-<file path=ppt/slides/slide20.xml><?xml version="1.0" encoding="utf-8"?>
+<file path=ppt/slides/slide21.xml><?xml version="1.0" encoding="utf-8"?>
 <p:sld xmlns:a="http://schemas.openxmlformats.org/drawingml/2006/main" xmlns:r="http://schemas.openxmlformats.org/officeDocument/2006/relationships" xmlns:p="http://schemas.openxmlformats.org/presentationml/2006/main">
   <p:cSld>
     <p:spTree>
@@ -5569,7 +5698,7 @@
 </p:sld>
 </file>
 
-<file path=ppt/slides/slide21.xml><?xml version="1.0" encoding="utf-8"?>
+<file path=ppt/slides/slide22.xml><?xml version="1.0" encoding="utf-8"?>
 <p:sld xmlns:a="http://schemas.openxmlformats.org/drawingml/2006/main" xmlns:r="http://schemas.openxmlformats.org/officeDocument/2006/relationships" xmlns:p="http://schemas.openxmlformats.org/presentationml/2006/main">
   <p:cSld>
     <p:spTree>
@@ -5843,7 +5972,7 @@
 </p:sld>
 </file>
 
-<file path=ppt/slides/slide22.xml><?xml version="1.0" encoding="utf-8"?>
+<file path=ppt/slides/slide23.xml><?xml version="1.0" encoding="utf-8"?>
 <p:sld xmlns:a="http://schemas.openxmlformats.org/drawingml/2006/main" xmlns:r="http://schemas.openxmlformats.org/officeDocument/2006/relationships" xmlns:p="http://schemas.openxmlformats.org/presentationml/2006/main">
   <p:cSld>
     <p:spTree>
@@ -5955,7 +6084,7 @@
 </p:sld>
 </file>
 
-<file path=ppt/slides/slide23.xml><?xml version="1.0" encoding="utf-8"?>
+<file path=ppt/slides/slide24.xml><?xml version="1.0" encoding="utf-8"?>
 <p:sld xmlns:a="http://schemas.openxmlformats.org/drawingml/2006/main" xmlns:r="http://schemas.openxmlformats.org/officeDocument/2006/relationships" xmlns:p="http://schemas.openxmlformats.org/presentationml/2006/main">
   <p:cSld>
     <p:spTree>
@@ -6288,7 +6417,7 @@
 </p:sld>
 </file>
 
-<file path=ppt/slides/slide24.xml><?xml version="1.0" encoding="utf-8"?>
+<file path=ppt/slides/slide25.xml><?xml version="1.0" encoding="utf-8"?>
 <p:sld xmlns:a="http://schemas.openxmlformats.org/drawingml/2006/main" xmlns:r="http://schemas.openxmlformats.org/officeDocument/2006/relationships" xmlns:p="http://schemas.openxmlformats.org/presentationml/2006/main">
   <p:cSld>
     <p:spTree>
@@ -6548,7 +6677,7 @@
 </p:sld>
 </file>
 
-<file path=ppt/slides/slide25.xml><?xml version="1.0" encoding="utf-8"?>
+<file path=ppt/slides/slide26.xml><?xml version="1.0" encoding="utf-8"?>
 <p:sld xmlns:a="http://schemas.openxmlformats.org/drawingml/2006/main" xmlns:r="http://schemas.openxmlformats.org/officeDocument/2006/relationships" xmlns:p="http://schemas.openxmlformats.org/presentationml/2006/main">
   <p:cSld>
     <p:spTree>
@@ -6693,157 +6822,6 @@
     <p:extLst>
       <p:ext uri="{BB962C8B-B14F-4D97-AF65-F5344CB8AC3E}">
         <p14:creationId xmlns:p14="http://schemas.microsoft.com/office/powerpoint/2010/main" val="3631914593"/>
-      </p:ext>
-    </p:extLst>
-  </p:cSld>
-  <p:clrMapOvr>
-    <a:masterClrMapping/>
-  </p:clrMapOvr>
-</p:sld>
-</file>
-
-<file path=ppt/slides/slide26.xml><?xml version="1.0" encoding="utf-8"?>
-<p:sld xmlns:a="http://schemas.openxmlformats.org/drawingml/2006/main" xmlns:r="http://schemas.openxmlformats.org/officeDocument/2006/relationships" xmlns:p="http://schemas.openxmlformats.org/presentationml/2006/main">
-  <p:cSld>
-    <p:spTree>
-      <p:nvGrpSpPr>
-        <p:cNvPr id="1" name=""/>
-        <p:cNvGrpSpPr/>
-        <p:nvPr/>
-      </p:nvGrpSpPr>
-      <p:grpSpPr>
-        <a:xfrm>
-          <a:off x="0" y="0"/>
-          <a:ext cx="0" cy="0"/>
-          <a:chOff x="0" y="0"/>
-          <a:chExt cx="0" cy="0"/>
-        </a:xfrm>
-      </p:grpSpPr>
-      <p:sp>
-        <p:nvSpPr>
-          <p:cNvPr id="2" name="Titre 1">
-            <a:extLst>
-              <a:ext uri="{FF2B5EF4-FFF2-40B4-BE49-F238E27FC236}">
-                <a16:creationId xmlns:a16="http://schemas.microsoft.com/office/drawing/2014/main" id="{27C621C4-271F-BCBF-47DB-1D4B9D67B68E}"/>
-              </a:ext>
-            </a:extLst>
-          </p:cNvPr>
-          <p:cNvSpPr>
-            <a:spLocks noGrp="1"/>
-          </p:cNvSpPr>
-          <p:nvPr>
-            <p:ph type="title"/>
-          </p:nvPr>
-        </p:nvSpPr>
-        <p:spPr/>
-        <p:txBody>
-          <a:bodyPr/>
-          <a:lstStyle/>
-          <a:p>
-            <a:r>
-              <a:rPr lang="fr-FR" dirty="0"/>
-              <a:t>Dataviz</a:t>
-            </a:r>
-          </a:p>
-        </p:txBody>
-      </p:sp>
-      <p:sp>
-        <p:nvSpPr>
-          <p:cNvPr id="3" name="Espace réservé du contenu 2">
-            <a:extLst>
-              <a:ext uri="{FF2B5EF4-FFF2-40B4-BE49-F238E27FC236}">
-                <a16:creationId xmlns:a16="http://schemas.microsoft.com/office/drawing/2014/main" id="{71C14DB0-BF73-B644-AD43-D8E0B922D17B}"/>
-              </a:ext>
-            </a:extLst>
-          </p:cNvPr>
-          <p:cNvSpPr>
-            <a:spLocks noGrp="1"/>
-          </p:cNvSpPr>
-          <p:nvPr>
-            <p:ph idx="1"/>
-          </p:nvPr>
-        </p:nvSpPr>
-        <p:spPr/>
-        <p:txBody>
-          <a:bodyPr/>
-          <a:lstStyle/>
-          <a:p>
-            <a:r>
-              <a:rPr lang="fr-FR" dirty="0"/>
-              <a:t>Représenter la donnée graphiquement</a:t>
-            </a:r>
-          </a:p>
-          <a:p>
-            <a:r>
-              <a:rPr lang="fr-FR" dirty="0"/>
-              <a:t>Outils commerciaux</a:t>
-            </a:r>
-          </a:p>
-          <a:p>
-            <a:pPr lvl="1"/>
-            <a:r>
-              <a:rPr lang="fr-FR" dirty="0"/>
-              <a:t>Excel</a:t>
-            </a:r>
-          </a:p>
-          <a:p>
-            <a:pPr lvl="1"/>
-            <a:r>
-              <a:rPr lang="fr-FR" dirty="0"/>
-              <a:t>Power BI</a:t>
-            </a:r>
-          </a:p>
-          <a:p>
-            <a:pPr lvl="1"/>
-            <a:r>
-              <a:rPr lang="fr-FR" dirty="0"/>
-              <a:t>Tableau</a:t>
-            </a:r>
-          </a:p>
-          <a:p>
-            <a:pPr lvl="1"/>
-            <a:r>
-              <a:rPr lang="fr-FR" dirty="0"/>
-              <a:t>Qlik</a:t>
-            </a:r>
-          </a:p>
-          <a:p>
-            <a:r>
-              <a:rPr lang="fr-FR" dirty="0"/>
-              <a:t>Outils libres de programmation</a:t>
-            </a:r>
-          </a:p>
-          <a:p>
-            <a:pPr lvl="1"/>
-            <a:r>
-              <a:rPr lang="fr-FR" dirty="0" err="1"/>
-              <a:t>Matplotlib</a:t>
-            </a:r>
-            <a:endParaRPr lang="fr-FR" dirty="0"/>
-          </a:p>
-          <a:p>
-            <a:pPr lvl="1"/>
-            <a:r>
-              <a:rPr lang="fr-FR" dirty="0" err="1"/>
-              <a:t>Seaborn</a:t>
-            </a:r>
-            <a:endParaRPr lang="fr-FR" dirty="0"/>
-          </a:p>
-          <a:p>
-            <a:r>
-              <a:rPr lang="fr-FR" dirty="0"/>
-              <a:t>Démonstration</a:t>
-            </a:r>
-          </a:p>
-          <a:p>
-            <a:endParaRPr lang="fr-FR" dirty="0"/>
-          </a:p>
-        </p:txBody>
-      </p:sp>
-    </p:spTree>
-    <p:extLst>
-      <p:ext uri="{BB962C8B-B14F-4D97-AF65-F5344CB8AC3E}">
-        <p14:creationId xmlns:p14="http://schemas.microsoft.com/office/powerpoint/2010/main" val="3596355371"/>
       </p:ext>
     </p:extLst>
   </p:cSld>
@@ -6872,6 +6850,157 @@
       </p:grpSpPr>
       <p:sp>
         <p:nvSpPr>
+          <p:cNvPr id="2" name="Titre 1">
+            <a:extLst>
+              <a:ext uri="{FF2B5EF4-FFF2-40B4-BE49-F238E27FC236}">
+                <a16:creationId xmlns:a16="http://schemas.microsoft.com/office/drawing/2014/main" id="{27C621C4-271F-BCBF-47DB-1D4B9D67B68E}"/>
+              </a:ext>
+            </a:extLst>
+          </p:cNvPr>
+          <p:cNvSpPr>
+            <a:spLocks noGrp="1"/>
+          </p:cNvSpPr>
+          <p:nvPr>
+            <p:ph type="title"/>
+          </p:nvPr>
+        </p:nvSpPr>
+        <p:spPr/>
+        <p:txBody>
+          <a:bodyPr/>
+          <a:lstStyle/>
+          <a:p>
+            <a:r>
+              <a:rPr lang="fr-FR" dirty="0"/>
+              <a:t>Dataviz</a:t>
+            </a:r>
+          </a:p>
+        </p:txBody>
+      </p:sp>
+      <p:sp>
+        <p:nvSpPr>
+          <p:cNvPr id="3" name="Espace réservé du contenu 2">
+            <a:extLst>
+              <a:ext uri="{FF2B5EF4-FFF2-40B4-BE49-F238E27FC236}">
+                <a16:creationId xmlns:a16="http://schemas.microsoft.com/office/drawing/2014/main" id="{71C14DB0-BF73-B644-AD43-D8E0B922D17B}"/>
+              </a:ext>
+            </a:extLst>
+          </p:cNvPr>
+          <p:cNvSpPr>
+            <a:spLocks noGrp="1"/>
+          </p:cNvSpPr>
+          <p:nvPr>
+            <p:ph idx="1"/>
+          </p:nvPr>
+        </p:nvSpPr>
+        <p:spPr/>
+        <p:txBody>
+          <a:bodyPr/>
+          <a:lstStyle/>
+          <a:p>
+            <a:r>
+              <a:rPr lang="fr-FR" dirty="0"/>
+              <a:t>Représenter la donnée graphiquement</a:t>
+            </a:r>
+          </a:p>
+          <a:p>
+            <a:r>
+              <a:rPr lang="fr-FR" dirty="0"/>
+              <a:t>Outils commerciaux</a:t>
+            </a:r>
+          </a:p>
+          <a:p>
+            <a:pPr lvl="1"/>
+            <a:r>
+              <a:rPr lang="fr-FR" dirty="0"/>
+              <a:t>Excel</a:t>
+            </a:r>
+          </a:p>
+          <a:p>
+            <a:pPr lvl="1"/>
+            <a:r>
+              <a:rPr lang="fr-FR" dirty="0"/>
+              <a:t>Power BI</a:t>
+            </a:r>
+          </a:p>
+          <a:p>
+            <a:pPr lvl="1"/>
+            <a:r>
+              <a:rPr lang="fr-FR" dirty="0"/>
+              <a:t>Tableau</a:t>
+            </a:r>
+          </a:p>
+          <a:p>
+            <a:pPr lvl="1"/>
+            <a:r>
+              <a:rPr lang="fr-FR" dirty="0"/>
+              <a:t>Qlik</a:t>
+            </a:r>
+          </a:p>
+          <a:p>
+            <a:r>
+              <a:rPr lang="fr-FR" dirty="0"/>
+              <a:t>Outils libres de programmation</a:t>
+            </a:r>
+          </a:p>
+          <a:p>
+            <a:pPr lvl="1"/>
+            <a:r>
+              <a:rPr lang="fr-FR" dirty="0" err="1"/>
+              <a:t>Matplotlib</a:t>
+            </a:r>
+            <a:endParaRPr lang="fr-FR" dirty="0"/>
+          </a:p>
+          <a:p>
+            <a:pPr lvl="1"/>
+            <a:r>
+              <a:rPr lang="fr-FR" dirty="0" err="1"/>
+              <a:t>Seaborn</a:t>
+            </a:r>
+            <a:endParaRPr lang="fr-FR" dirty="0"/>
+          </a:p>
+          <a:p>
+            <a:r>
+              <a:rPr lang="fr-FR" dirty="0"/>
+              <a:t>Démonstration</a:t>
+            </a:r>
+          </a:p>
+          <a:p>
+            <a:endParaRPr lang="fr-FR" dirty="0"/>
+          </a:p>
+        </p:txBody>
+      </p:sp>
+    </p:spTree>
+    <p:extLst>
+      <p:ext uri="{BB962C8B-B14F-4D97-AF65-F5344CB8AC3E}">
+        <p14:creationId xmlns:p14="http://schemas.microsoft.com/office/powerpoint/2010/main" val="3596355371"/>
+      </p:ext>
+    </p:extLst>
+  </p:cSld>
+  <p:clrMapOvr>
+    <a:masterClrMapping/>
+  </p:clrMapOvr>
+</p:sld>
+</file>
+
+<file path=ppt/slides/slide28.xml><?xml version="1.0" encoding="utf-8"?>
+<p:sld xmlns:a="http://schemas.openxmlformats.org/drawingml/2006/main" xmlns:r="http://schemas.openxmlformats.org/officeDocument/2006/relationships" xmlns:p="http://schemas.openxmlformats.org/presentationml/2006/main">
+  <p:cSld>
+    <p:spTree>
+      <p:nvGrpSpPr>
+        <p:cNvPr id="1" name=""/>
+        <p:cNvGrpSpPr/>
+        <p:nvPr/>
+      </p:nvGrpSpPr>
+      <p:grpSpPr>
+        <a:xfrm>
+          <a:off x="0" y="0"/>
+          <a:ext cx="0" cy="0"/>
+          <a:chOff x="0" y="0"/>
+          <a:chExt cx="0" cy="0"/>
+        </a:xfrm>
+      </p:grpSpPr>
+      <p:sp>
+        <p:nvSpPr>
           <p:cNvPr id="2" name="Title 1"/>
           <p:cNvSpPr>
             <a:spLocks noGrp="1"/>
@@ -7021,151 +7150,6 @@
             </a:pPr>
             <a:r>
               <a:t>Illustration générée à partir de données simulées à des fins pédagogiques.</a:t>
-            </a:r>
-          </a:p>
-        </p:txBody>
-      </p:sp>
-    </p:spTree>
-  </p:cSld>
-  <p:clrMapOvr>
-    <a:masterClrMapping/>
-  </p:clrMapOvr>
-</p:sld>
-</file>
-
-<file path=ppt/slides/slide28.xml><?xml version="1.0" encoding="utf-8"?>
-<p:sld xmlns:a="http://schemas.openxmlformats.org/drawingml/2006/main" xmlns:r="http://schemas.openxmlformats.org/officeDocument/2006/relationships" xmlns:p="http://schemas.openxmlformats.org/presentationml/2006/main">
-  <p:cSld>
-    <p:spTree>
-      <p:nvGrpSpPr>
-        <p:cNvPr id="1" name=""/>
-        <p:cNvGrpSpPr/>
-        <p:nvPr/>
-      </p:nvGrpSpPr>
-      <p:grpSpPr>
-        <a:xfrm>
-          <a:off x="0" y="0"/>
-          <a:ext cx="0" cy="0"/>
-          <a:chOff x="0" y="0"/>
-          <a:chExt cx="0" cy="0"/>
-        </a:xfrm>
-      </p:grpSpPr>
-      <p:sp>
-        <p:nvSpPr>
-          <p:cNvPr id="2" name="Title 1"/>
-          <p:cNvSpPr>
-            <a:spLocks noGrp="1"/>
-          </p:cNvSpPr>
-          <p:nvPr>
-            <p:ph type="title"/>
-          </p:nvPr>
-        </p:nvSpPr>
-        <p:spPr/>
-        <p:txBody>
-          <a:bodyPr/>
-          <a:lstStyle/>
-          <a:p>
-            <a:pPr>
-              <a:defRPr sz="3400" b="1">
-                <a:solidFill>
-                  <a:srgbClr val="212529"/>
-                </a:solidFill>
-                <a:latin typeface="Calibri"/>
-              </a:defRPr>
-            </a:pPr>
-            <a:r>
-              <a:t>Ensembles d’entraînement, validation et test</a:t>
-            </a:r>
-          </a:p>
-        </p:txBody>
-      </p:sp>
-      <p:sp>
-        <p:nvSpPr>
-          <p:cNvPr id="3" name="Content Placeholder 2"/>
-          <p:cNvSpPr>
-            <a:spLocks noGrp="1"/>
-          </p:cNvSpPr>
-          <p:nvPr>
-            <p:ph idx="1"/>
-          </p:nvPr>
-        </p:nvSpPr>
-        <p:spPr/>
-        <p:txBody>
-          <a:bodyPr/>
-          <a:lstStyle/>
-          <a:p>
-            <a:endParaRPr/>
-          </a:p>
-          <a:p>
-            <a:pPr>
-              <a:defRPr sz="1800">
-                <a:solidFill>
-                  <a:srgbClr val="373B3F"/>
-                </a:solidFill>
-                <a:latin typeface="Calibri"/>
-              </a:defRPr>
-            </a:pPr>
-            <a:r>
-              <a:t>Séparer les ensembles évite la fuite d’information et garantit une estimation honnête de performance. Par exemple, réserver un jeu de test temporel permet de simuler une mise en production future et d’évaluer la robustesse réellement attendue.</a:t>
-            </a:r>
-          </a:p>
-        </p:txBody>
-      </p:sp>
-      <p:pic>
-        <p:nvPicPr>
-          <p:cNvPr id="4" name="Picture 3" descr="chart_split.png"/>
-          <p:cNvPicPr>
-            <a:picLocks noChangeAspect="1"/>
-          </p:cNvPicPr>
-          <p:nvPr/>
-        </p:nvPicPr>
-        <p:blipFill>
-          <a:blip r:embed="rId2"/>
-          <a:stretch>
-            <a:fillRect/>
-          </a:stretch>
-        </p:blipFill>
-        <p:spPr>
-          <a:xfrm>
-            <a:off x="5220072" y="3212976"/>
-            <a:ext cx="2916776" cy="2926080"/>
-          </a:xfrm>
-          <a:prstGeom prst="rect">
-            <a:avLst/>
-          </a:prstGeom>
-        </p:spPr>
-      </p:pic>
-      <p:sp>
-        <p:nvSpPr>
-          <p:cNvPr id="5" name="TextBox 4"/>
-          <p:cNvSpPr txBox="1"/>
-          <p:nvPr/>
-        </p:nvSpPr>
-        <p:spPr>
-          <a:xfrm>
-            <a:off x="9326880" y="6217920"/>
-            <a:ext cx="1097280" cy="274320"/>
-          </a:xfrm>
-          <a:prstGeom prst="rect">
-            <a:avLst/>
-          </a:prstGeom>
-          <a:noFill/>
-        </p:spPr>
-        <p:txBody>
-          <a:bodyPr wrap="none">
-            <a:spAutoFit/>
-          </a:bodyPr>
-          <a:lstStyle/>
-          <a:p>
-            <a:pPr algn="r">
-              <a:defRPr sz="1100">
-                <a:solidFill>
-                  <a:srgbClr val="787878"/>
-                </a:solidFill>
-              </a:defRPr>
-            </a:pPr>
-            <a:r>
-              <a:t>16/30</a:t>
             </a:r>
           </a:p>
         </p:txBody>
@@ -7219,7 +7203,7 @@
               </a:defRPr>
             </a:pPr>
             <a:r>
-              <a:t>Outils pour la visualisation (Dataviz)</a:t>
+              <a:t>Ensembles d’entraînement, validation et test</a:t>
             </a:r>
           </a:p>
         </p:txBody>
@@ -7251,14 +7235,14 @@
               </a:defRPr>
             </a:pPr>
             <a:r>
-              <a:t>La dataviz sert l’exploration, l’explication et la décision. Par exemple, un graphique en barres comparant des canaux marketing révèle immédiatement l’efficacité relative et guide la redistribution budgétaire vers les leviers les plus performants rapidement.</a:t>
+              <a:t>Séparer les ensembles évite la fuite d’information et garantit une estimation honnête de performance. Par exemple, réserver un jeu de test temporel permet de simuler une mise en production future et d’évaluer la robustesse réellement attendue.</a:t>
             </a:r>
           </a:p>
         </p:txBody>
       </p:sp>
       <p:pic>
         <p:nvPicPr>
-          <p:cNvPr id="4" name="Picture 3" descr="chart_histogram.png"/>
+          <p:cNvPr id="4" name="Picture 3" descr="chart_split.png"/>
           <p:cNvPicPr>
             <a:picLocks noChangeAspect="1"/>
           </p:cNvPicPr>
@@ -7272,8 +7256,8 @@
         </p:blipFill>
         <p:spPr>
           <a:xfrm>
-            <a:off x="2195736" y="3259994"/>
-            <a:ext cx="4311574" cy="2926080"/>
+            <a:off x="5220072" y="3212976"/>
+            <a:ext cx="2916776" cy="2926080"/>
           </a:xfrm>
           <a:prstGeom prst="rect">
             <a:avLst/>
@@ -7310,42 +7294,7 @@
               </a:defRPr>
             </a:pPr>
             <a:r>
-              <a:t>18/30</a:t>
-            </a:r>
-          </a:p>
-        </p:txBody>
-      </p:sp>
-      <p:sp>
-        <p:nvSpPr>
-          <p:cNvPr id="6" name="TextBox 5"/>
-          <p:cNvSpPr txBox="1"/>
-          <p:nvPr/>
-        </p:nvSpPr>
-        <p:spPr>
-          <a:xfrm>
-            <a:off x="5486400" y="4846320"/>
-            <a:ext cx="3657600" cy="640080"/>
-          </a:xfrm>
-          <a:prstGeom prst="rect">
-            <a:avLst/>
-          </a:prstGeom>
-          <a:noFill/>
-        </p:spPr>
-        <p:txBody>
-          <a:bodyPr wrap="none">
-            <a:spAutoFit/>
-          </a:bodyPr>
-          <a:lstStyle/>
-          <a:p>
-            <a:pPr>
-              <a:defRPr sz="1000">
-                <a:solidFill>
-                  <a:srgbClr val="646464"/>
-                </a:solidFill>
-              </a:defRPr>
-            </a:pPr>
-            <a:r>
-              <a:t>Illustration générée à partir de données simulées à des fins pédagogiques.</a:t>
+              <a:t>16/30</a:t>
             </a:r>
           </a:p>
         </p:txBody>
@@ -7487,7 +7436,7 @@
               </a:defRPr>
             </a:pPr>
             <a:r>
-              <a:t>Cas pratique 1 : Préparation d’un dataset pour l’IA</a:t>
+              <a:t>Outils pour la visualisation (Dataviz)</a:t>
             </a:r>
           </a:p>
         </p:txBody>
@@ -7507,7 +7456,7 @@
           <a:bodyPr/>
           <a:lstStyle/>
           <a:p>
-            <a:endParaRPr sz="3600" dirty="0"/>
+            <a:endParaRPr/>
           </a:p>
           <a:p>
             <a:pPr>
@@ -7519,174 +7468,38 @@
               </a:defRPr>
             </a:pPr>
             <a:r>
-              <a:rPr sz="2400" dirty="0"/>
-              <a:t>À </a:t>
-            </a:r>
-            <a:r>
-              <a:rPr sz="2400" dirty="0" err="1"/>
-              <a:t>partir</a:t>
-            </a:r>
-            <a:r>
-              <a:rPr sz="2400" dirty="0"/>
-              <a:t> d’un </a:t>
-            </a:r>
-            <a:r>
-              <a:rPr sz="2400" dirty="0" err="1"/>
-              <a:t>fichier</a:t>
-            </a:r>
-            <a:r>
-              <a:rPr sz="2400" dirty="0"/>
-              <a:t> ventes, nous </a:t>
-            </a:r>
-            <a:r>
-              <a:rPr sz="2400" dirty="0" err="1"/>
-              <a:t>profilons</a:t>
-            </a:r>
-            <a:r>
-              <a:rPr sz="2400" dirty="0"/>
-              <a:t> les </a:t>
-            </a:r>
-            <a:r>
-              <a:rPr sz="2400" dirty="0" err="1"/>
-              <a:t>colonnes</a:t>
-            </a:r>
-            <a:r>
-              <a:rPr sz="2400" dirty="0"/>
-              <a:t>, </a:t>
-            </a:r>
-            <a:r>
-              <a:rPr sz="2400" dirty="0" err="1"/>
-              <a:t>traitons</a:t>
-            </a:r>
-            <a:r>
-              <a:rPr sz="2400" dirty="0"/>
-              <a:t> les </a:t>
-            </a:r>
-            <a:r>
-              <a:rPr sz="2400" dirty="0" err="1"/>
-              <a:t>valeurs</a:t>
-            </a:r>
-            <a:r>
-              <a:rPr sz="2400" dirty="0"/>
-              <a:t> </a:t>
-            </a:r>
-            <a:r>
-              <a:rPr sz="2400" dirty="0" err="1"/>
-              <a:t>manquantes</a:t>
-            </a:r>
-            <a:r>
-              <a:rPr sz="2400" dirty="0"/>
-              <a:t> et </a:t>
-            </a:r>
-            <a:r>
-              <a:rPr sz="2400" dirty="0" err="1"/>
-              <a:t>créons</a:t>
-            </a:r>
-            <a:r>
-              <a:rPr sz="2400" dirty="0"/>
-              <a:t> des variables </a:t>
-            </a:r>
-            <a:r>
-              <a:rPr sz="2400" dirty="0" err="1"/>
-              <a:t>dérivées</a:t>
-            </a:r>
-            <a:r>
-              <a:rPr sz="2400" dirty="0"/>
-              <a:t>. </a:t>
-            </a:r>
-            <a:endParaRPr lang="fr-FR" sz="2400" dirty="0"/>
-          </a:p>
-          <a:p>
-            <a:pPr>
-              <a:defRPr sz="1800">
-                <a:solidFill>
-                  <a:srgbClr val="373B3F"/>
-                </a:solidFill>
-                <a:latin typeface="Calibri"/>
-              </a:defRPr>
-            </a:pPr>
-            <a:r>
-              <a:rPr sz="2400" dirty="0"/>
-              <a:t>Par </a:t>
-            </a:r>
-            <a:r>
-              <a:rPr sz="2400" dirty="0" err="1"/>
-              <a:t>exemple</a:t>
-            </a:r>
-            <a:r>
-              <a:rPr sz="2400" dirty="0"/>
-              <a:t>, la </a:t>
-            </a:r>
-            <a:r>
-              <a:rPr sz="2400" dirty="0" err="1"/>
-              <a:t>création</a:t>
-            </a:r>
-            <a:r>
-              <a:rPr sz="2400" dirty="0"/>
-              <a:t> d’un </a:t>
-            </a:r>
-            <a:r>
-              <a:rPr sz="2400" dirty="0" err="1"/>
-              <a:t>indicateur</a:t>
-            </a:r>
-            <a:r>
-              <a:rPr sz="2400" dirty="0"/>
-              <a:t> de </a:t>
-            </a:r>
-            <a:r>
-              <a:rPr sz="2400" dirty="0" err="1"/>
-              <a:t>récence</a:t>
-            </a:r>
-            <a:r>
-              <a:rPr sz="2400" dirty="0"/>
-              <a:t> </a:t>
-            </a:r>
-            <a:r>
-              <a:rPr sz="2400" dirty="0" err="1"/>
-              <a:t>améliore</a:t>
-            </a:r>
-            <a:r>
-              <a:rPr sz="2400" dirty="0"/>
-              <a:t> un </a:t>
-            </a:r>
-            <a:r>
-              <a:rPr sz="2400" dirty="0" err="1"/>
-              <a:t>modèle</a:t>
-            </a:r>
-            <a:r>
-              <a:rPr sz="2400" dirty="0"/>
-              <a:t> de churn </a:t>
-            </a:r>
-            <a:r>
-              <a:rPr sz="2400" dirty="0" err="1"/>
-              <a:t>en</a:t>
-            </a:r>
-            <a:r>
-              <a:rPr sz="2400" dirty="0"/>
-              <a:t> </a:t>
-            </a:r>
-            <a:r>
-              <a:rPr sz="2400" dirty="0" err="1"/>
-              <a:t>offrant</a:t>
-            </a:r>
-            <a:r>
-              <a:rPr sz="2400" dirty="0"/>
-              <a:t> un signal </a:t>
-            </a:r>
-            <a:r>
-              <a:rPr sz="2400" dirty="0" err="1"/>
-              <a:t>comportemental</a:t>
-            </a:r>
-            <a:r>
-              <a:rPr sz="2400" dirty="0"/>
-              <a:t> simple et puissant ensemble.</a:t>
-            </a:r>
-          </a:p>
-        </p:txBody>
-      </p:sp>
-      <p:sp>
-        <p:nvSpPr>
-          <p:cNvPr id="4" name="TextBox 3"/>
+              <a:t>La dataviz sert l’exploration, l’explication et la décision. Par exemple, un graphique en barres comparant des canaux marketing révèle immédiatement l’efficacité relative et guide la redistribution budgétaire vers les leviers les plus performants rapidement.</a:t>
+            </a:r>
+          </a:p>
+        </p:txBody>
+      </p:sp>
+      <p:pic>
+        <p:nvPicPr>
+          <p:cNvPr id="4" name="Picture 3" descr="chart_histogram.png"/>
+          <p:cNvPicPr>
+            <a:picLocks noChangeAspect="1"/>
+          </p:cNvPicPr>
+          <p:nvPr/>
+        </p:nvPicPr>
+        <p:blipFill>
+          <a:blip r:embed="rId2"/>
+          <a:stretch>
+            <a:fillRect/>
+          </a:stretch>
+        </p:blipFill>
+        <p:spPr>
+          <a:xfrm>
+            <a:off x="2195736" y="3259994"/>
+            <a:ext cx="4311574" cy="2926080"/>
+          </a:xfrm>
+          <a:prstGeom prst="rect">
+            <a:avLst/>
+          </a:prstGeom>
+        </p:spPr>
+      </p:pic>
+      <p:sp>
+        <p:nvSpPr>
+          <p:cNvPr id="5" name="TextBox 4"/>
           <p:cNvSpPr txBox="1"/>
           <p:nvPr/>
         </p:nvSpPr>
@@ -7714,7 +7527,42 @@
               </a:defRPr>
             </a:pPr>
             <a:r>
-              <a:t>24/30</a:t>
+              <a:t>18/30</a:t>
+            </a:r>
+          </a:p>
+        </p:txBody>
+      </p:sp>
+      <p:sp>
+        <p:nvSpPr>
+          <p:cNvPr id="6" name="TextBox 5"/>
+          <p:cNvSpPr txBox="1"/>
+          <p:nvPr/>
+        </p:nvSpPr>
+        <p:spPr>
+          <a:xfrm>
+            <a:off x="5486400" y="4846320"/>
+            <a:ext cx="3657600" cy="640080"/>
+          </a:xfrm>
+          <a:prstGeom prst="rect">
+            <a:avLst/>
+          </a:prstGeom>
+          <a:noFill/>
+        </p:spPr>
+        <p:txBody>
+          <a:bodyPr wrap="none">
+            <a:spAutoFit/>
+          </a:bodyPr>
+          <a:lstStyle/>
+          <a:p>
+            <a:pPr>
+              <a:defRPr sz="1000">
+                <a:solidFill>
+                  <a:srgbClr val="646464"/>
+                </a:solidFill>
+              </a:defRPr>
+            </a:pPr>
+            <a:r>
+              <a:t>Illustration générée à partir de données simulées à des fins pédagogiques.</a:t>
             </a:r>
           </a:p>
         </p:txBody>
@@ -7768,7 +7616,7 @@
               </a:defRPr>
             </a:pPr>
             <a:r>
-              <a:t>Cas pratique 2 : Visualisation et interprétation</a:t>
+              <a:t>Cas pratique 1 : Préparation d’un dataset pour l’IA</a:t>
             </a:r>
           </a:p>
         </p:txBody>
@@ -7788,7 +7636,7 @@
           <a:bodyPr/>
           <a:lstStyle/>
           <a:p>
-            <a:endParaRPr/>
+            <a:endParaRPr sz="3600" dirty="0"/>
           </a:p>
           <a:p>
             <a:pPr>
@@ -7800,38 +7648,174 @@
               </a:defRPr>
             </a:pPr>
             <a:r>
-              <a:t>Nous construisons un tableau de bord simple avec ventes, marge et taux de retour. Par exemple, un graphique lignes par semaine révèle une saisonnalité, tandis qu’une carte met en évidence des régions sous-performantes nécessitant un plan d’actions ciblé réactif.</a:t>
-            </a:r>
-          </a:p>
-        </p:txBody>
-      </p:sp>
-      <p:pic>
-        <p:nvPicPr>
-          <p:cNvPr id="4" name="Picture 3" descr="chart_drift.png"/>
-          <p:cNvPicPr>
-            <a:picLocks noChangeAspect="1"/>
-          </p:cNvPicPr>
-          <p:nvPr/>
-        </p:nvPicPr>
-        <p:blipFill>
-          <a:blip r:embed="rId2"/>
-          <a:stretch>
-            <a:fillRect/>
-          </a:stretch>
-        </p:blipFill>
-        <p:spPr>
-          <a:xfrm>
-            <a:off x="2387398" y="3294342"/>
-            <a:ext cx="4350278" cy="2926080"/>
-          </a:xfrm>
-          <a:prstGeom prst="rect">
-            <a:avLst/>
-          </a:prstGeom>
-        </p:spPr>
-      </p:pic>
-      <p:sp>
-        <p:nvSpPr>
-          <p:cNvPr id="5" name="TextBox 4"/>
+              <a:rPr sz="2400" dirty="0"/>
+              <a:t>À </a:t>
+            </a:r>
+            <a:r>
+              <a:rPr sz="2400" dirty="0" err="1"/>
+              <a:t>partir</a:t>
+            </a:r>
+            <a:r>
+              <a:rPr sz="2400" dirty="0"/>
+              <a:t> d’un </a:t>
+            </a:r>
+            <a:r>
+              <a:rPr sz="2400" dirty="0" err="1"/>
+              <a:t>fichier</a:t>
+            </a:r>
+            <a:r>
+              <a:rPr sz="2400" dirty="0"/>
+              <a:t> ventes, nous </a:t>
+            </a:r>
+            <a:r>
+              <a:rPr sz="2400" dirty="0" err="1"/>
+              <a:t>profilons</a:t>
+            </a:r>
+            <a:r>
+              <a:rPr sz="2400" dirty="0"/>
+              <a:t> les </a:t>
+            </a:r>
+            <a:r>
+              <a:rPr sz="2400" dirty="0" err="1"/>
+              <a:t>colonnes</a:t>
+            </a:r>
+            <a:r>
+              <a:rPr sz="2400" dirty="0"/>
+              <a:t>, </a:t>
+            </a:r>
+            <a:r>
+              <a:rPr sz="2400" dirty="0" err="1"/>
+              <a:t>traitons</a:t>
+            </a:r>
+            <a:r>
+              <a:rPr sz="2400" dirty="0"/>
+              <a:t> les </a:t>
+            </a:r>
+            <a:r>
+              <a:rPr sz="2400" dirty="0" err="1"/>
+              <a:t>valeurs</a:t>
+            </a:r>
+            <a:r>
+              <a:rPr sz="2400" dirty="0"/>
+              <a:t> </a:t>
+            </a:r>
+            <a:r>
+              <a:rPr sz="2400" dirty="0" err="1"/>
+              <a:t>manquantes</a:t>
+            </a:r>
+            <a:r>
+              <a:rPr sz="2400" dirty="0"/>
+              <a:t> et </a:t>
+            </a:r>
+            <a:r>
+              <a:rPr sz="2400" dirty="0" err="1"/>
+              <a:t>créons</a:t>
+            </a:r>
+            <a:r>
+              <a:rPr sz="2400" dirty="0"/>
+              <a:t> des variables </a:t>
+            </a:r>
+            <a:r>
+              <a:rPr sz="2400" dirty="0" err="1"/>
+              <a:t>dérivées</a:t>
+            </a:r>
+            <a:r>
+              <a:rPr sz="2400" dirty="0"/>
+              <a:t>. </a:t>
+            </a:r>
+            <a:endParaRPr lang="fr-FR" sz="2400" dirty="0"/>
+          </a:p>
+          <a:p>
+            <a:pPr>
+              <a:defRPr sz="1800">
+                <a:solidFill>
+                  <a:srgbClr val="373B3F"/>
+                </a:solidFill>
+                <a:latin typeface="Calibri"/>
+              </a:defRPr>
+            </a:pPr>
+            <a:r>
+              <a:rPr sz="2400" dirty="0"/>
+              <a:t>Par </a:t>
+            </a:r>
+            <a:r>
+              <a:rPr sz="2400" dirty="0" err="1"/>
+              <a:t>exemple</a:t>
+            </a:r>
+            <a:r>
+              <a:rPr sz="2400" dirty="0"/>
+              <a:t>, la </a:t>
+            </a:r>
+            <a:r>
+              <a:rPr sz="2400" dirty="0" err="1"/>
+              <a:t>création</a:t>
+            </a:r>
+            <a:r>
+              <a:rPr sz="2400" dirty="0"/>
+              <a:t> d’un </a:t>
+            </a:r>
+            <a:r>
+              <a:rPr sz="2400" dirty="0" err="1"/>
+              <a:t>indicateur</a:t>
+            </a:r>
+            <a:r>
+              <a:rPr sz="2400" dirty="0"/>
+              <a:t> de </a:t>
+            </a:r>
+            <a:r>
+              <a:rPr sz="2400" dirty="0" err="1"/>
+              <a:t>récence</a:t>
+            </a:r>
+            <a:r>
+              <a:rPr sz="2400" dirty="0"/>
+              <a:t> </a:t>
+            </a:r>
+            <a:r>
+              <a:rPr sz="2400" dirty="0" err="1"/>
+              <a:t>améliore</a:t>
+            </a:r>
+            <a:r>
+              <a:rPr sz="2400" dirty="0"/>
+              <a:t> un </a:t>
+            </a:r>
+            <a:r>
+              <a:rPr sz="2400" dirty="0" err="1"/>
+              <a:t>modèle</a:t>
+            </a:r>
+            <a:r>
+              <a:rPr sz="2400" dirty="0"/>
+              <a:t> de churn </a:t>
+            </a:r>
+            <a:r>
+              <a:rPr sz="2400" dirty="0" err="1"/>
+              <a:t>en</a:t>
+            </a:r>
+            <a:r>
+              <a:rPr sz="2400" dirty="0"/>
+              <a:t> </a:t>
+            </a:r>
+            <a:r>
+              <a:rPr sz="2400" dirty="0" err="1"/>
+              <a:t>offrant</a:t>
+            </a:r>
+            <a:r>
+              <a:rPr sz="2400" dirty="0"/>
+              <a:t> un signal </a:t>
+            </a:r>
+            <a:r>
+              <a:rPr sz="2400" dirty="0" err="1"/>
+              <a:t>comportemental</a:t>
+            </a:r>
+            <a:r>
+              <a:rPr sz="2400" dirty="0"/>
+              <a:t> simple et puissant ensemble.</a:t>
+            </a:r>
+          </a:p>
+        </p:txBody>
+      </p:sp>
+      <p:sp>
+        <p:nvSpPr>
+          <p:cNvPr id="4" name="TextBox 3"/>
           <p:cNvSpPr txBox="1"/>
           <p:nvPr/>
         </p:nvSpPr>
@@ -7859,42 +7843,7 @@
               </a:defRPr>
             </a:pPr>
             <a:r>
-              <a:t>25/30</a:t>
-            </a:r>
-          </a:p>
-        </p:txBody>
-      </p:sp>
-      <p:sp>
-        <p:nvSpPr>
-          <p:cNvPr id="6" name="TextBox 5"/>
-          <p:cNvSpPr txBox="1"/>
-          <p:nvPr/>
-        </p:nvSpPr>
-        <p:spPr>
-          <a:xfrm>
-            <a:off x="5486400" y="4846320"/>
-            <a:ext cx="3657600" cy="640080"/>
-          </a:xfrm>
-          <a:prstGeom prst="rect">
-            <a:avLst/>
-          </a:prstGeom>
-          <a:noFill/>
-        </p:spPr>
-        <p:txBody>
-          <a:bodyPr wrap="none">
-            <a:spAutoFit/>
-          </a:bodyPr>
-          <a:lstStyle/>
-          <a:p>
-            <a:pPr>
-              <a:defRPr sz="1000">
-                <a:solidFill>
-                  <a:srgbClr val="646464"/>
-                </a:solidFill>
-              </a:defRPr>
-            </a:pPr>
-            <a:r>
-              <a:t>Illustration générée à partir de données simulées à des fins pédagogiques.</a:t>
+              <a:t>24/30</a:t>
             </a:r>
           </a:p>
         </p:txBody>
@@ -7948,7 +7897,7 @@
               </a:defRPr>
             </a:pPr>
             <a:r>
-              <a:t>Étude de cas : projet Data Science en entreprise</a:t>
+              <a:t>Cas pratique 2 : Visualisation et interprétation</a:t>
             </a:r>
           </a:p>
         </p:txBody>
@@ -7980,14 +7929,14 @@
               </a:defRPr>
             </a:pPr>
             <a:r>
-              <a:t>Sur un cas de prévision de demande, la consolidation des historiques et promotions a permis d’abaisser les ruptures. Par exemple, une réduction de dix pour cent des stocks dormants a été obtenue grâce à une meilleure allocation par entrepôt géographiquement adaptée efficacement.</a:t>
+              <a:t>Nous construisons un tableau de bord simple avec ventes, marge et taux de retour. Par exemple, un graphique lignes par semaine révèle une saisonnalité, tandis qu’une carte met en évidence des régions sous-performantes nécessitant un plan d’actions ciblé réactif.</a:t>
             </a:r>
           </a:p>
         </p:txBody>
       </p:sp>
       <p:pic>
         <p:nvPicPr>
-          <p:cNvPr id="4" name="Picture 3" descr="chart_confusion.png"/>
+          <p:cNvPr id="4" name="Picture 3" descr="chart_drift.png"/>
           <p:cNvPicPr>
             <a:picLocks noChangeAspect="1"/>
           </p:cNvPicPr>
@@ -8001,8 +7950,8 @@
         </p:blipFill>
         <p:spPr>
           <a:xfrm>
-            <a:off x="4860032" y="3237411"/>
-            <a:ext cx="3701601" cy="2926080"/>
+            <a:off x="2387398" y="3294342"/>
+            <a:ext cx="4350278" cy="2926080"/>
           </a:xfrm>
           <a:prstGeom prst="rect">
             <a:avLst/>
@@ -8039,7 +7988,7 @@
               </a:defRPr>
             </a:pPr>
             <a:r>
-              <a:t>26/30</a:t>
+              <a:t>25/30</a:t>
             </a:r>
           </a:p>
         </p:txBody>
@@ -8128,7 +8077,7 @@
               </a:defRPr>
             </a:pPr>
             <a:r>
-              <a:t>Retour d’expérience : erreurs fréquentes</a:t>
+              <a:t>Étude de cas : projet Data Science en entreprise</a:t>
             </a:r>
           </a:p>
         </p:txBody>
@@ -8148,7 +8097,7 @@
           <a:bodyPr/>
           <a:lstStyle/>
           <a:p>
-            <a:endParaRPr sz="4800" dirty="0"/>
+            <a:endParaRPr/>
           </a:p>
           <a:p>
             <a:pPr>
@@ -8160,190 +8109,38 @@
               </a:defRPr>
             </a:pPr>
             <a:r>
-              <a:rPr sz="2400" dirty="0"/>
-              <a:t>Les </a:t>
-            </a:r>
-            <a:r>
-              <a:rPr sz="2400" dirty="0" err="1"/>
-              <a:t>écueils</a:t>
-            </a:r>
-            <a:r>
-              <a:rPr sz="2400" dirty="0"/>
-              <a:t> </a:t>
-            </a:r>
-            <a:r>
-              <a:rPr sz="2400" dirty="0" err="1"/>
-              <a:t>récurrents</a:t>
-            </a:r>
-            <a:r>
-              <a:rPr sz="2400" dirty="0"/>
-              <a:t> </a:t>
-            </a:r>
-            <a:r>
-              <a:rPr sz="2400" dirty="0" err="1"/>
-              <a:t>incluent</a:t>
-            </a:r>
-            <a:r>
-              <a:rPr sz="2400" dirty="0"/>
-              <a:t> la </a:t>
-            </a:r>
-            <a:r>
-              <a:rPr sz="2400" dirty="0" err="1"/>
-              <a:t>fuite</a:t>
-            </a:r>
-            <a:r>
-              <a:rPr sz="2400" dirty="0"/>
-              <a:t> de </a:t>
-            </a:r>
-            <a:r>
-              <a:rPr sz="2400" dirty="0" err="1"/>
-              <a:t>cibles</a:t>
-            </a:r>
-            <a:r>
-              <a:rPr sz="2400" dirty="0"/>
-              <a:t>, </a:t>
-            </a:r>
-            <a:r>
-              <a:rPr sz="2400" dirty="0" err="1"/>
-              <a:t>l’échantillon</a:t>
-            </a:r>
-            <a:r>
-              <a:rPr sz="2400" dirty="0"/>
-              <a:t> non </a:t>
-            </a:r>
-            <a:r>
-              <a:rPr sz="2400" dirty="0" err="1"/>
-              <a:t>représentatif</a:t>
-            </a:r>
-            <a:r>
-              <a:rPr sz="2400" dirty="0"/>
-              <a:t> et la </a:t>
-            </a:r>
-            <a:r>
-              <a:rPr sz="2400" dirty="0" err="1"/>
-              <a:t>métrique</a:t>
-            </a:r>
-            <a:r>
-              <a:rPr sz="2400" dirty="0"/>
-              <a:t> </a:t>
-            </a:r>
-            <a:r>
-              <a:rPr sz="2400" dirty="0" err="1"/>
-              <a:t>inadéquate</a:t>
-            </a:r>
-            <a:r>
-              <a:rPr sz="2400" dirty="0"/>
-              <a:t>. </a:t>
-            </a:r>
-            <a:endParaRPr lang="fr-FR" sz="2400" dirty="0"/>
-          </a:p>
-          <a:p>
-            <a:pPr>
-              <a:defRPr sz="1800">
-                <a:solidFill>
-                  <a:srgbClr val="373B3F"/>
-                </a:solidFill>
-                <a:latin typeface="Calibri"/>
-              </a:defRPr>
-            </a:pPr>
-            <a:r>
-              <a:rPr sz="2400" dirty="0"/>
-              <a:t>Par </a:t>
-            </a:r>
-            <a:r>
-              <a:rPr sz="2400" dirty="0" err="1"/>
-              <a:t>exemple</a:t>
-            </a:r>
-            <a:r>
-              <a:rPr sz="2400" dirty="0"/>
-              <a:t>, </a:t>
-            </a:r>
-            <a:r>
-              <a:rPr sz="2400" dirty="0" err="1"/>
-              <a:t>optimiser</a:t>
-            </a:r>
-            <a:r>
-              <a:rPr sz="2400" dirty="0"/>
-              <a:t> </a:t>
-            </a:r>
-            <a:r>
-              <a:rPr sz="2400" dirty="0" err="1"/>
-              <a:t>une</a:t>
-            </a:r>
-            <a:r>
-              <a:rPr sz="2400" dirty="0"/>
-              <a:t> </a:t>
-            </a:r>
-            <a:r>
-              <a:rPr sz="2400" dirty="0" err="1"/>
-              <a:t>précision</a:t>
-            </a:r>
-            <a:r>
-              <a:rPr sz="2400" dirty="0"/>
-              <a:t> </a:t>
-            </a:r>
-            <a:r>
-              <a:rPr sz="2400" dirty="0" err="1"/>
-              <a:t>globale</a:t>
-            </a:r>
-            <a:r>
-              <a:rPr sz="2400" dirty="0"/>
-              <a:t> sur données </a:t>
-            </a:r>
-            <a:r>
-              <a:rPr sz="2400" dirty="0" err="1"/>
-              <a:t>déséquilibrées</a:t>
-            </a:r>
-            <a:r>
-              <a:rPr sz="2400" dirty="0"/>
-              <a:t> masque les faux </a:t>
-            </a:r>
-            <a:r>
-              <a:rPr sz="2400" dirty="0" err="1"/>
-              <a:t>négatifs</a:t>
-            </a:r>
-            <a:r>
-              <a:rPr sz="2400" dirty="0"/>
-              <a:t> critiques pour </a:t>
-            </a:r>
-            <a:r>
-              <a:rPr sz="2400" dirty="0" err="1"/>
-              <a:t>l’activité</a:t>
-            </a:r>
-            <a:r>
-              <a:rPr sz="2400" dirty="0"/>
-              <a:t>, </a:t>
-            </a:r>
-            <a:r>
-              <a:rPr sz="2400" dirty="0" err="1"/>
-              <a:t>provoquant</a:t>
-            </a:r>
-            <a:r>
-              <a:rPr sz="2400" dirty="0"/>
-              <a:t> des </a:t>
-            </a:r>
-            <a:r>
-              <a:rPr sz="2400" dirty="0" err="1"/>
-              <a:t>décisions</a:t>
-            </a:r>
-            <a:r>
-              <a:rPr sz="2400" dirty="0"/>
-              <a:t> </a:t>
-            </a:r>
-            <a:r>
-              <a:rPr sz="2400" dirty="0" err="1"/>
-              <a:t>risquées</a:t>
-            </a:r>
-            <a:r>
-              <a:rPr sz="2400" dirty="0"/>
-              <a:t> ensuite.</a:t>
-            </a:r>
-          </a:p>
-        </p:txBody>
-      </p:sp>
-      <p:sp>
-        <p:nvSpPr>
-          <p:cNvPr id="4" name="TextBox 3"/>
+              <a:t>Sur un cas de prévision de demande, la consolidation des historiques et promotions a permis d’abaisser les ruptures. Par exemple, une réduction de dix pour cent des stocks dormants a été obtenue grâce à une meilleure allocation par entrepôt géographiquement adaptée efficacement.</a:t>
+            </a:r>
+          </a:p>
+        </p:txBody>
+      </p:sp>
+      <p:pic>
+        <p:nvPicPr>
+          <p:cNvPr id="4" name="Picture 3" descr="chart_confusion.png"/>
+          <p:cNvPicPr>
+            <a:picLocks noChangeAspect="1"/>
+          </p:cNvPicPr>
+          <p:nvPr/>
+        </p:nvPicPr>
+        <p:blipFill>
+          <a:blip r:embed="rId2"/>
+          <a:stretch>
+            <a:fillRect/>
+          </a:stretch>
+        </p:blipFill>
+        <p:spPr>
+          <a:xfrm>
+            <a:off x="4860032" y="3237411"/>
+            <a:ext cx="3701601" cy="2926080"/>
+          </a:xfrm>
+          <a:prstGeom prst="rect">
+            <a:avLst/>
+          </a:prstGeom>
+        </p:spPr>
+      </p:pic>
+      <p:sp>
+        <p:nvSpPr>
+          <p:cNvPr id="5" name="TextBox 4"/>
           <p:cNvSpPr txBox="1"/>
           <p:nvPr/>
         </p:nvSpPr>
@@ -8371,7 +8168,42 @@
               </a:defRPr>
             </a:pPr>
             <a:r>
-              <a:t>27/30</a:t>
+              <a:t>26/30</a:t>
+            </a:r>
+          </a:p>
+        </p:txBody>
+      </p:sp>
+      <p:sp>
+        <p:nvSpPr>
+          <p:cNvPr id="6" name="TextBox 5"/>
+          <p:cNvSpPr txBox="1"/>
+          <p:nvPr/>
+        </p:nvSpPr>
+        <p:spPr>
+          <a:xfrm>
+            <a:off x="5486400" y="4846320"/>
+            <a:ext cx="3657600" cy="640080"/>
+          </a:xfrm>
+          <a:prstGeom prst="rect">
+            <a:avLst/>
+          </a:prstGeom>
+          <a:noFill/>
+        </p:spPr>
+        <p:txBody>
+          <a:bodyPr wrap="none">
+            <a:spAutoFit/>
+          </a:bodyPr>
+          <a:lstStyle/>
+          <a:p>
+            <a:pPr>
+              <a:defRPr sz="1000">
+                <a:solidFill>
+                  <a:srgbClr val="646464"/>
+                </a:solidFill>
+              </a:defRPr>
+            </a:pPr>
+            <a:r>
+              <a:t>Illustration générée à partir de données simulées à des fins pédagogiques.</a:t>
             </a:r>
           </a:p>
         </p:txBody>
@@ -8425,7 +8257,7 @@
               </a:defRPr>
             </a:pPr>
             <a:r>
-              <a:t>Gouvernance &amp; conformité (RGPD, sécurité)</a:t>
+              <a:t>Retour d’expérience : erreurs fréquentes</a:t>
             </a:r>
           </a:p>
         </p:txBody>
@@ -8445,7 +8277,7 @@
           <a:bodyPr/>
           <a:lstStyle/>
           <a:p>
-            <a:endParaRPr sz="3600" dirty="0"/>
+            <a:endParaRPr sz="4800" dirty="0"/>
           </a:p>
           <a:p>
             <a:pPr>
@@ -8458,11 +8290,43 @@
             </a:pPr>
             <a:r>
               <a:rPr sz="2400" dirty="0"/>
-              <a:t>Assurer base </a:t>
+              <a:t>Les </a:t>
             </a:r>
             <a:r>
               <a:rPr sz="2400" dirty="0" err="1"/>
-              <a:t>légale</a:t>
+              <a:t>écueils</a:t>
+            </a:r>
+            <a:r>
+              <a:rPr sz="2400" dirty="0"/>
+              <a:t> </a:t>
+            </a:r>
+            <a:r>
+              <a:rPr sz="2400" dirty="0" err="1"/>
+              <a:t>récurrents</a:t>
+            </a:r>
+            <a:r>
+              <a:rPr sz="2400" dirty="0"/>
+              <a:t> </a:t>
+            </a:r>
+            <a:r>
+              <a:rPr sz="2400" dirty="0" err="1"/>
+              <a:t>incluent</a:t>
+            </a:r>
+            <a:r>
+              <a:rPr sz="2400" dirty="0"/>
+              <a:t> la </a:t>
+            </a:r>
+            <a:r>
+              <a:rPr sz="2400" dirty="0" err="1"/>
+              <a:t>fuite</a:t>
+            </a:r>
+            <a:r>
+              <a:rPr sz="2400" dirty="0"/>
+              <a:t> de </a:t>
+            </a:r>
+            <a:r>
+              <a:rPr sz="2400" dirty="0" err="1"/>
+              <a:t>cibles</a:t>
             </a:r>
             <a:r>
               <a:rPr sz="2400" dirty="0"/>
@@ -8470,23 +8334,23 @@
             </a:r>
             <a:r>
               <a:rPr sz="2400" dirty="0" err="1"/>
-              <a:t>minimisation</a:t>
+              <a:t>l’échantillon</a:t>
             </a:r>
             <a:r>
               <a:rPr sz="2400" dirty="0"/>
-              <a:t> et droits des </a:t>
+              <a:t> non </a:t>
             </a:r>
             <a:r>
               <a:rPr sz="2400" dirty="0" err="1"/>
-              <a:t>personnes</a:t>
+              <a:t>représentatif</a:t>
             </a:r>
             <a:r>
               <a:rPr sz="2400" dirty="0"/>
-              <a:t>, avec </a:t>
+              <a:t> et la </a:t>
             </a:r>
             <a:r>
               <a:rPr sz="2400" dirty="0" err="1"/>
-              <a:t>sécurité</a:t>
+              <a:t>métrique</a:t>
             </a:r>
             <a:r>
               <a:rPr sz="2400" dirty="0"/>
@@ -8494,15 +8358,7 @@
             </a:r>
             <a:r>
               <a:rPr sz="2400" dirty="0" err="1"/>
-              <a:t>d’accès</a:t>
-            </a:r>
-            <a:r>
-              <a:rPr sz="2400" dirty="0"/>
-              <a:t> et </a:t>
-            </a:r>
-            <a:r>
-              <a:rPr sz="2400" dirty="0" err="1"/>
-              <a:t>journalisation</a:t>
+              <a:t>inadéquate</a:t>
             </a:r>
             <a:r>
               <a:rPr sz="2400" dirty="0"/>
@@ -8533,31 +8389,7 @@
             </a:r>
             <a:r>
               <a:rPr sz="2400" dirty="0" err="1"/>
-              <a:t>pseudonymiser</a:t>
-            </a:r>
-            <a:r>
-              <a:rPr sz="2400" dirty="0"/>
-              <a:t> les </a:t>
-            </a:r>
-            <a:r>
-              <a:rPr sz="2400" dirty="0" err="1"/>
-              <a:t>identifiants</a:t>
-            </a:r>
-            <a:r>
-              <a:rPr sz="2400" dirty="0"/>
-              <a:t> clients </a:t>
-            </a:r>
-            <a:r>
-              <a:rPr sz="2400" dirty="0" err="1"/>
-              <a:t>en</a:t>
-            </a:r>
-            <a:r>
-              <a:rPr sz="2400" dirty="0"/>
-              <a:t> sandbox </a:t>
-            </a:r>
-            <a:r>
-              <a:rPr sz="2400" dirty="0" err="1"/>
-              <a:t>permet</a:t>
+              <a:t>optimiser</a:t>
             </a:r>
             <a:r>
               <a:rPr sz="2400" dirty="0"/>
@@ -8565,15 +8397,7 @@
             </a:r>
             <a:r>
               <a:rPr sz="2400" dirty="0" err="1"/>
-              <a:t>l’exploration</a:t>
-            </a:r>
-            <a:r>
-              <a:rPr sz="2400" dirty="0"/>
-              <a:t> des données sans exposition inutile </a:t>
-            </a:r>
-            <a:r>
-              <a:rPr sz="2400" dirty="0" err="1"/>
-              <a:t>d’informations</a:t>
+              <a:t>une</a:t>
             </a:r>
             <a:r>
               <a:rPr sz="2400" dirty="0"/>
@@ -8581,7 +8405,7 @@
             </a:r>
             <a:r>
               <a:rPr sz="2400" dirty="0" err="1"/>
-              <a:t>personnelles</a:t>
+              <a:t>précision</a:t>
             </a:r>
             <a:r>
               <a:rPr sz="2400" dirty="0"/>
@@ -8589,7 +8413,47 @@
             </a:r>
             <a:r>
               <a:rPr sz="2400" dirty="0" err="1"/>
-              <a:t>sensibles</a:t>
+              <a:t>globale</a:t>
+            </a:r>
+            <a:r>
+              <a:rPr sz="2400" dirty="0"/>
+              <a:t> sur données </a:t>
+            </a:r>
+            <a:r>
+              <a:rPr sz="2400" dirty="0" err="1"/>
+              <a:t>déséquilibrées</a:t>
+            </a:r>
+            <a:r>
+              <a:rPr sz="2400" dirty="0"/>
+              <a:t> masque les faux </a:t>
+            </a:r>
+            <a:r>
+              <a:rPr sz="2400" dirty="0" err="1"/>
+              <a:t>négatifs</a:t>
+            </a:r>
+            <a:r>
+              <a:rPr sz="2400" dirty="0"/>
+              <a:t> critiques pour </a:t>
+            </a:r>
+            <a:r>
+              <a:rPr sz="2400" dirty="0" err="1"/>
+              <a:t>l’activité</a:t>
+            </a:r>
+            <a:r>
+              <a:rPr sz="2400" dirty="0"/>
+              <a:t>, </a:t>
+            </a:r>
+            <a:r>
+              <a:rPr sz="2400" dirty="0" err="1"/>
+              <a:t>provoquant</a:t>
+            </a:r>
+            <a:r>
+              <a:rPr sz="2400" dirty="0"/>
+              <a:t> des </a:t>
+            </a:r>
+            <a:r>
+              <a:rPr sz="2400" dirty="0" err="1"/>
+              <a:t>décisions</a:t>
             </a:r>
             <a:r>
               <a:rPr sz="2400" dirty="0"/>
@@ -8597,11 +8461,11 @@
             </a:r>
             <a:r>
               <a:rPr sz="2400" dirty="0" err="1"/>
-              <a:t>effectivement</a:t>
+              <a:t>risquées</a:t>
             </a:r>
             <a:r>
               <a:rPr sz="2400" dirty="0"/>
-              <a:t>.</a:t>
+              <a:t> ensuite.</a:t>
             </a:r>
           </a:p>
         </p:txBody>
@@ -8636,7 +8500,7 @@
               </a:defRPr>
             </a:pPr>
             <a:r>
-              <a:t>28/30</a:t>
+              <a:t>27/30</a:t>
             </a:r>
           </a:p>
         </p:txBody>
@@ -8650,6 +8514,271 @@
 </file>
 
 <file path=ppt/slides/slide35.xml><?xml version="1.0" encoding="utf-8"?>
+<p:sld xmlns:a="http://schemas.openxmlformats.org/drawingml/2006/main" xmlns:r="http://schemas.openxmlformats.org/officeDocument/2006/relationships" xmlns:p="http://schemas.openxmlformats.org/presentationml/2006/main">
+  <p:cSld>
+    <p:spTree>
+      <p:nvGrpSpPr>
+        <p:cNvPr id="1" name=""/>
+        <p:cNvGrpSpPr/>
+        <p:nvPr/>
+      </p:nvGrpSpPr>
+      <p:grpSpPr>
+        <a:xfrm>
+          <a:off x="0" y="0"/>
+          <a:ext cx="0" cy="0"/>
+          <a:chOff x="0" y="0"/>
+          <a:chExt cx="0" cy="0"/>
+        </a:xfrm>
+      </p:grpSpPr>
+      <p:sp>
+        <p:nvSpPr>
+          <p:cNvPr id="2" name="Title 1"/>
+          <p:cNvSpPr>
+            <a:spLocks noGrp="1"/>
+          </p:cNvSpPr>
+          <p:nvPr>
+            <p:ph type="title"/>
+          </p:nvPr>
+        </p:nvSpPr>
+        <p:spPr/>
+        <p:txBody>
+          <a:bodyPr/>
+          <a:lstStyle/>
+          <a:p>
+            <a:pPr>
+              <a:defRPr sz="3400" b="1">
+                <a:solidFill>
+                  <a:srgbClr val="212529"/>
+                </a:solidFill>
+                <a:latin typeface="Calibri"/>
+              </a:defRPr>
+            </a:pPr>
+            <a:r>
+              <a:t>Gouvernance &amp; conformité (RGPD, sécurité)</a:t>
+            </a:r>
+          </a:p>
+        </p:txBody>
+      </p:sp>
+      <p:sp>
+        <p:nvSpPr>
+          <p:cNvPr id="3" name="Content Placeholder 2"/>
+          <p:cNvSpPr>
+            <a:spLocks noGrp="1"/>
+          </p:cNvSpPr>
+          <p:nvPr>
+            <p:ph idx="1"/>
+          </p:nvPr>
+        </p:nvSpPr>
+        <p:spPr/>
+        <p:txBody>
+          <a:bodyPr/>
+          <a:lstStyle/>
+          <a:p>
+            <a:endParaRPr sz="3600" dirty="0"/>
+          </a:p>
+          <a:p>
+            <a:pPr>
+              <a:defRPr sz="1800">
+                <a:solidFill>
+                  <a:srgbClr val="373B3F"/>
+                </a:solidFill>
+                <a:latin typeface="Calibri"/>
+              </a:defRPr>
+            </a:pPr>
+            <a:r>
+              <a:rPr sz="2400" dirty="0"/>
+              <a:t>Assurer base </a:t>
+            </a:r>
+            <a:r>
+              <a:rPr sz="2400" dirty="0" err="1"/>
+              <a:t>légale</a:t>
+            </a:r>
+            <a:r>
+              <a:rPr sz="2400" dirty="0"/>
+              <a:t>, </a:t>
+            </a:r>
+            <a:r>
+              <a:rPr sz="2400" dirty="0" err="1"/>
+              <a:t>minimisation</a:t>
+            </a:r>
+            <a:r>
+              <a:rPr sz="2400" dirty="0"/>
+              <a:t> et droits des </a:t>
+            </a:r>
+            <a:r>
+              <a:rPr sz="2400" dirty="0" err="1"/>
+              <a:t>personnes</a:t>
+            </a:r>
+            <a:r>
+              <a:rPr sz="2400" dirty="0"/>
+              <a:t>, avec </a:t>
+            </a:r>
+            <a:r>
+              <a:rPr sz="2400" dirty="0" err="1"/>
+              <a:t>sécurité</a:t>
+            </a:r>
+            <a:r>
+              <a:rPr sz="2400" dirty="0"/>
+              <a:t> </a:t>
+            </a:r>
+            <a:r>
+              <a:rPr sz="2400" dirty="0" err="1"/>
+              <a:t>d’accès</a:t>
+            </a:r>
+            <a:r>
+              <a:rPr sz="2400" dirty="0"/>
+              <a:t> et </a:t>
+            </a:r>
+            <a:r>
+              <a:rPr sz="2400" dirty="0" err="1"/>
+              <a:t>journalisation</a:t>
+            </a:r>
+            <a:r>
+              <a:rPr sz="2400" dirty="0"/>
+              <a:t>. </a:t>
+            </a:r>
+            <a:endParaRPr lang="fr-FR" sz="2400" dirty="0"/>
+          </a:p>
+          <a:p>
+            <a:pPr>
+              <a:defRPr sz="1800">
+                <a:solidFill>
+                  <a:srgbClr val="373B3F"/>
+                </a:solidFill>
+                <a:latin typeface="Calibri"/>
+              </a:defRPr>
+            </a:pPr>
+            <a:r>
+              <a:rPr sz="2400" dirty="0"/>
+              <a:t>Par </a:t>
+            </a:r>
+            <a:r>
+              <a:rPr sz="2400" dirty="0" err="1"/>
+              <a:t>exemple</a:t>
+            </a:r>
+            <a:r>
+              <a:rPr sz="2400" dirty="0"/>
+              <a:t>, </a:t>
+            </a:r>
+            <a:r>
+              <a:rPr sz="2400" dirty="0" err="1"/>
+              <a:t>pseudonymiser</a:t>
+            </a:r>
+            <a:r>
+              <a:rPr sz="2400" dirty="0"/>
+              <a:t> les </a:t>
+            </a:r>
+            <a:r>
+              <a:rPr sz="2400" dirty="0" err="1"/>
+              <a:t>identifiants</a:t>
+            </a:r>
+            <a:r>
+              <a:rPr sz="2400" dirty="0"/>
+              <a:t> clients </a:t>
+            </a:r>
+            <a:r>
+              <a:rPr sz="2400" dirty="0" err="1"/>
+              <a:t>en</a:t>
+            </a:r>
+            <a:r>
+              <a:rPr sz="2400" dirty="0"/>
+              <a:t> sandbox </a:t>
+            </a:r>
+            <a:r>
+              <a:rPr sz="2400" dirty="0" err="1"/>
+              <a:t>permet</a:t>
+            </a:r>
+            <a:r>
+              <a:rPr sz="2400" dirty="0"/>
+              <a:t> </a:t>
+            </a:r>
+            <a:r>
+              <a:rPr sz="2400" dirty="0" err="1"/>
+              <a:t>l’exploration</a:t>
+            </a:r>
+            <a:r>
+              <a:rPr sz="2400" dirty="0"/>
+              <a:t> des données sans exposition inutile </a:t>
+            </a:r>
+            <a:r>
+              <a:rPr sz="2400" dirty="0" err="1"/>
+              <a:t>d’informations</a:t>
+            </a:r>
+            <a:r>
+              <a:rPr sz="2400" dirty="0"/>
+              <a:t> </a:t>
+            </a:r>
+            <a:r>
+              <a:rPr sz="2400" dirty="0" err="1"/>
+              <a:t>personnelles</a:t>
+            </a:r>
+            <a:r>
+              <a:rPr sz="2400" dirty="0"/>
+              <a:t> </a:t>
+            </a:r>
+            <a:r>
+              <a:rPr sz="2400" dirty="0" err="1"/>
+              <a:t>sensibles</a:t>
+            </a:r>
+            <a:r>
+              <a:rPr sz="2400" dirty="0"/>
+              <a:t> </a:t>
+            </a:r>
+            <a:r>
+              <a:rPr sz="2400" dirty="0" err="1"/>
+              <a:t>effectivement</a:t>
+            </a:r>
+            <a:r>
+              <a:rPr sz="2400" dirty="0"/>
+              <a:t>.</a:t>
+            </a:r>
+          </a:p>
+        </p:txBody>
+      </p:sp>
+      <p:sp>
+        <p:nvSpPr>
+          <p:cNvPr id="4" name="TextBox 3"/>
+          <p:cNvSpPr txBox="1"/>
+          <p:nvPr/>
+        </p:nvSpPr>
+        <p:spPr>
+          <a:xfrm>
+            <a:off x="9326880" y="6217920"/>
+            <a:ext cx="1097280" cy="274320"/>
+          </a:xfrm>
+          <a:prstGeom prst="rect">
+            <a:avLst/>
+          </a:prstGeom>
+          <a:noFill/>
+        </p:spPr>
+        <p:txBody>
+          <a:bodyPr wrap="none">
+            <a:spAutoFit/>
+          </a:bodyPr>
+          <a:lstStyle/>
+          <a:p>
+            <a:pPr algn="r">
+              <a:defRPr sz="1100">
+                <a:solidFill>
+                  <a:srgbClr val="787878"/>
+                </a:solidFill>
+              </a:defRPr>
+            </a:pPr>
+            <a:r>
+              <a:t>28/30</a:t>
+            </a:r>
+          </a:p>
+        </p:txBody>
+      </p:sp>
+    </p:spTree>
+  </p:cSld>
+  <p:clrMapOvr>
+    <a:masterClrMapping/>
+  </p:clrMapOvr>
+</p:sld>
+</file>
+
+<file path=ppt/slides/slide36.xml><?xml version="1.0" encoding="utf-8"?>
 <p:sld xmlns:a="http://schemas.openxmlformats.org/drawingml/2006/main" xmlns:r="http://schemas.openxmlformats.org/officeDocument/2006/relationships" xmlns:p="http://schemas.openxmlformats.org/presentationml/2006/main">
   <p:cSld>
     <p:spTree>
@@ -8782,7 +8911,7 @@
 </p:sld>
 </file>
 
-<file path=ppt/slides/slide36.xml><?xml version="1.0" encoding="utf-8"?>
+<file path=ppt/slides/slide37.xml><?xml version="1.0" encoding="utf-8"?>
 <p:sld xmlns:a="http://schemas.openxmlformats.org/drawingml/2006/main" xmlns:r="http://schemas.openxmlformats.org/officeDocument/2006/relationships" xmlns:p="http://schemas.openxmlformats.org/presentationml/2006/main">
   <p:cSld>
     <p:spTree>
@@ -8922,7 +9051,7 @@
 </p:sld>
 </file>
 
-<file path=ppt/slides/slide37.xml><?xml version="1.0" encoding="utf-8"?>
+<file path=ppt/slides/slide38.xml><?xml version="1.0" encoding="utf-8"?>
 <p:sld xmlns:a="http://schemas.openxmlformats.org/drawingml/2006/main" xmlns:r="http://schemas.openxmlformats.org/officeDocument/2006/relationships" xmlns:p="http://schemas.openxmlformats.org/presentationml/2006/main">
   <p:cSld>
     <p:spTree>
@@ -9065,7 +9194,7 @@
 </p:sld>
 </file>
 
-<file path=ppt/slides/slide38.xml><?xml version="1.0" encoding="utf-8"?>
+<file path=ppt/slides/slide39.xml><?xml version="1.0" encoding="utf-8"?>
 <p:sld xmlns:a="http://schemas.openxmlformats.org/drawingml/2006/main" xmlns:r="http://schemas.openxmlformats.org/officeDocument/2006/relationships" xmlns:p="http://schemas.openxmlformats.org/presentationml/2006/main">
   <p:cSld>
     <p:spTree>
@@ -9181,7 +9310,102 @@
 </p:sld>
 </file>
 
-<file path=ppt/slides/slide39.xml><?xml version="1.0" encoding="utf-8"?>
+<file path=ppt/slides/slide4.xml><?xml version="1.0" encoding="utf-8"?>
+<p:sld xmlns:a="http://schemas.openxmlformats.org/drawingml/2006/main" xmlns:r="http://schemas.openxmlformats.org/officeDocument/2006/relationships" xmlns:p="http://schemas.openxmlformats.org/presentationml/2006/main">
+  <p:cSld>
+    <p:spTree>
+      <p:nvGrpSpPr>
+        <p:cNvPr id="1" name=""/>
+        <p:cNvGrpSpPr/>
+        <p:nvPr/>
+      </p:nvGrpSpPr>
+      <p:grpSpPr>
+        <a:xfrm>
+          <a:off x="0" y="0"/>
+          <a:ext cx="0" cy="0"/>
+          <a:chOff x="0" y="0"/>
+          <a:chExt cx="0" cy="0"/>
+        </a:xfrm>
+      </p:grpSpPr>
+      <p:sp>
+        <p:nvSpPr>
+          <p:cNvPr id="2" name="Titre 1"/>
+          <p:cNvSpPr>
+            <a:spLocks noGrp="1"/>
+          </p:cNvSpPr>
+          <p:nvPr>
+            <p:ph type="title"/>
+          </p:nvPr>
+        </p:nvSpPr>
+        <p:spPr/>
+        <p:txBody>
+          <a:bodyPr/>
+          <a:lstStyle/>
+          <a:p>
+            <a:r>
+              <a:rPr lang="fr-FR" dirty="0"/>
+              <a:t>Data Science</a:t>
+            </a:r>
+          </a:p>
+        </p:txBody>
+      </p:sp>
+      <p:pic>
+        <p:nvPicPr>
+          <p:cNvPr id="1026" name="Picture 2" descr="https://upload.wikimedia.org/wikipedia/commons/4/44/DataScienceDisciplines.png"/>
+          <p:cNvPicPr>
+            <a:picLocks noGrp="1" noChangeAspect="1" noChangeArrowheads="1"/>
+          </p:cNvPicPr>
+          <p:nvPr>
+            <p:ph idx="1"/>
+          </p:nvPr>
+        </p:nvPicPr>
+        <p:blipFill>
+          <a:blip r:embed="rId2">
+            <a:extLst>
+              <a:ext uri="{28A0092B-C50C-407E-A947-70E740481C1C}">
+                <a14:useLocalDpi xmlns:a14="http://schemas.microsoft.com/office/drawing/2010/main" val="0"/>
+              </a:ext>
+            </a:extLst>
+          </a:blip>
+          <a:srcRect/>
+          <a:stretch>
+            <a:fillRect/>
+          </a:stretch>
+        </p:blipFill>
+        <p:spPr bwMode="auto">
+          <a:xfrm>
+            <a:off x="1202267" y="1412875"/>
+            <a:ext cx="6720417" cy="5040313"/>
+          </a:xfrm>
+          <a:prstGeom prst="rect">
+            <a:avLst/>
+          </a:prstGeom>
+          <a:noFill/>
+          <a:extLst>
+            <a:ext uri="{909E8E84-426E-40DD-AFC4-6F175D3DCCD1}">
+              <a14:hiddenFill xmlns:a14="http://schemas.microsoft.com/office/drawing/2010/main">
+                <a:solidFill>
+                  <a:srgbClr val="FFFFFF"/>
+                </a:solidFill>
+              </a14:hiddenFill>
+            </a:ext>
+          </a:extLst>
+        </p:spPr>
+      </p:pic>
+    </p:spTree>
+    <p:extLst>
+      <p:ext uri="{BB962C8B-B14F-4D97-AF65-F5344CB8AC3E}">
+        <p14:creationId xmlns:p14="http://schemas.microsoft.com/office/powerpoint/2010/main" val="3051903952"/>
+      </p:ext>
+    </p:extLst>
+  </p:cSld>
+  <p:clrMapOvr>
+    <a:masterClrMapping/>
+  </p:clrMapOvr>
+</p:sld>
+</file>
+
+<file path=ppt/slides/slide40.xml><?xml version="1.0" encoding="utf-8"?>
 <p:sld xmlns:a="http://schemas.openxmlformats.org/drawingml/2006/main" xmlns:r="http://schemas.openxmlformats.org/officeDocument/2006/relationships" xmlns:p="http://schemas.openxmlformats.org/presentationml/2006/main">
   <p:cSld>
     <p:spTree>
@@ -9314,102 +9538,7 @@
 </p:sld>
 </file>
 
-<file path=ppt/slides/slide4.xml><?xml version="1.0" encoding="utf-8"?>
-<p:sld xmlns:a="http://schemas.openxmlformats.org/drawingml/2006/main" xmlns:r="http://schemas.openxmlformats.org/officeDocument/2006/relationships" xmlns:p="http://schemas.openxmlformats.org/presentationml/2006/main">
-  <p:cSld>
-    <p:spTree>
-      <p:nvGrpSpPr>
-        <p:cNvPr id="1" name=""/>
-        <p:cNvGrpSpPr/>
-        <p:nvPr/>
-      </p:nvGrpSpPr>
-      <p:grpSpPr>
-        <a:xfrm>
-          <a:off x="0" y="0"/>
-          <a:ext cx="0" cy="0"/>
-          <a:chOff x="0" y="0"/>
-          <a:chExt cx="0" cy="0"/>
-        </a:xfrm>
-      </p:grpSpPr>
-      <p:sp>
-        <p:nvSpPr>
-          <p:cNvPr id="2" name="Titre 1"/>
-          <p:cNvSpPr>
-            <a:spLocks noGrp="1"/>
-          </p:cNvSpPr>
-          <p:nvPr>
-            <p:ph type="title"/>
-          </p:nvPr>
-        </p:nvSpPr>
-        <p:spPr/>
-        <p:txBody>
-          <a:bodyPr/>
-          <a:lstStyle/>
-          <a:p>
-            <a:r>
-              <a:rPr lang="fr-FR" dirty="0"/>
-              <a:t>Data Science</a:t>
-            </a:r>
-          </a:p>
-        </p:txBody>
-      </p:sp>
-      <p:pic>
-        <p:nvPicPr>
-          <p:cNvPr id="1026" name="Picture 2" descr="https://upload.wikimedia.org/wikipedia/commons/4/44/DataScienceDisciplines.png"/>
-          <p:cNvPicPr>
-            <a:picLocks noGrp="1" noChangeAspect="1" noChangeArrowheads="1"/>
-          </p:cNvPicPr>
-          <p:nvPr>
-            <p:ph idx="1"/>
-          </p:nvPr>
-        </p:nvPicPr>
-        <p:blipFill>
-          <a:blip r:embed="rId2">
-            <a:extLst>
-              <a:ext uri="{28A0092B-C50C-407E-A947-70E740481C1C}">
-                <a14:useLocalDpi xmlns:a14="http://schemas.microsoft.com/office/drawing/2010/main" val="0"/>
-              </a:ext>
-            </a:extLst>
-          </a:blip>
-          <a:srcRect/>
-          <a:stretch>
-            <a:fillRect/>
-          </a:stretch>
-        </p:blipFill>
-        <p:spPr bwMode="auto">
-          <a:xfrm>
-            <a:off x="1202267" y="1412875"/>
-            <a:ext cx="6720417" cy="5040313"/>
-          </a:xfrm>
-          <a:prstGeom prst="rect">
-            <a:avLst/>
-          </a:prstGeom>
-          <a:noFill/>
-          <a:extLst>
-            <a:ext uri="{909E8E84-426E-40DD-AFC4-6F175D3DCCD1}">
-              <a14:hiddenFill xmlns:a14="http://schemas.microsoft.com/office/drawing/2010/main">
-                <a:solidFill>
-                  <a:srgbClr val="FFFFFF"/>
-                </a:solidFill>
-              </a14:hiddenFill>
-            </a:ext>
-          </a:extLst>
-        </p:spPr>
-      </p:pic>
-    </p:spTree>
-    <p:extLst>
-      <p:ext uri="{BB962C8B-B14F-4D97-AF65-F5344CB8AC3E}">
-        <p14:creationId xmlns:p14="http://schemas.microsoft.com/office/powerpoint/2010/main" val="3051903952"/>
-      </p:ext>
-    </p:extLst>
-  </p:cSld>
-  <p:clrMapOvr>
-    <a:masterClrMapping/>
-  </p:clrMapOvr>
-</p:sld>
-</file>
-
-<file path=ppt/slides/slide40.xml><?xml version="1.0" encoding="utf-8"?>
+<file path=ppt/slides/slide41.xml><?xml version="1.0" encoding="utf-8"?>
 <p:sld xmlns:a="http://schemas.openxmlformats.org/drawingml/2006/main" xmlns:r="http://schemas.openxmlformats.org/officeDocument/2006/relationships" xmlns:p="http://schemas.openxmlformats.org/presentationml/2006/main">
   <p:cSld>
     <p:spTree>
@@ -9539,7 +9668,7 @@
 </p:sld>
 </file>
 
-<file path=ppt/slides/slide41.xml><?xml version="1.0" encoding="utf-8"?>
+<file path=ppt/slides/slide42.xml><?xml version="1.0" encoding="utf-8"?>
 <p:sld xmlns:a="http://schemas.openxmlformats.org/drawingml/2006/main" xmlns:r="http://schemas.openxmlformats.org/officeDocument/2006/relationships" xmlns:p="http://schemas.openxmlformats.org/presentationml/2006/main">
   <p:cSld>
     <p:spTree>
@@ -9669,114 +9798,6 @@
 </p:sld>
 </file>
 
-<file path=ppt/slides/slide42.xml><?xml version="1.0" encoding="utf-8"?>
-<p:sld xmlns:a="http://schemas.openxmlformats.org/drawingml/2006/main" xmlns:r="http://schemas.openxmlformats.org/officeDocument/2006/relationships" xmlns:p="http://schemas.openxmlformats.org/presentationml/2006/main">
-  <p:cSld>
-    <p:spTree>
-      <p:nvGrpSpPr>
-        <p:cNvPr id="1" name=""/>
-        <p:cNvGrpSpPr/>
-        <p:nvPr/>
-      </p:nvGrpSpPr>
-      <p:grpSpPr>
-        <a:xfrm>
-          <a:off x="0" y="0"/>
-          <a:ext cx="0" cy="0"/>
-          <a:chOff x="0" y="0"/>
-          <a:chExt cx="0" cy="0"/>
-        </a:xfrm>
-      </p:grpSpPr>
-      <p:sp>
-        <p:nvSpPr>
-          <p:cNvPr id="2" name="Titre 1">
-            <a:extLst>
-              <a:ext uri="{FF2B5EF4-FFF2-40B4-BE49-F238E27FC236}">
-                <a16:creationId xmlns:a16="http://schemas.microsoft.com/office/drawing/2014/main" id="{0CBC48DB-4917-4000-6ADE-9BDFFAA5C311}"/>
-              </a:ext>
-            </a:extLst>
-          </p:cNvPr>
-          <p:cNvSpPr>
-            <a:spLocks noGrp="1"/>
-          </p:cNvSpPr>
-          <p:nvPr>
-            <p:ph type="title"/>
-          </p:nvPr>
-        </p:nvSpPr>
-        <p:spPr/>
-        <p:txBody>
-          <a:bodyPr/>
-          <a:lstStyle/>
-          <a:p>
-            <a:r>
-              <a:rPr lang="fr-FR" dirty="0" err="1"/>
-              <a:t>ChatGPT</a:t>
-            </a:r>
-            <a:endParaRPr lang="fr-FR" dirty="0"/>
-          </a:p>
-        </p:txBody>
-      </p:sp>
-      <p:sp>
-        <p:nvSpPr>
-          <p:cNvPr id="3" name="Espace réservé du contenu 2">
-            <a:extLst>
-              <a:ext uri="{FF2B5EF4-FFF2-40B4-BE49-F238E27FC236}">
-                <a16:creationId xmlns:a16="http://schemas.microsoft.com/office/drawing/2014/main" id="{2E9810CD-A28D-E5EA-5316-565B2D1E93BA}"/>
-              </a:ext>
-            </a:extLst>
-          </p:cNvPr>
-          <p:cNvSpPr>
-            <a:spLocks noGrp="1"/>
-          </p:cNvSpPr>
-          <p:nvPr>
-            <p:ph idx="1"/>
-          </p:nvPr>
-        </p:nvSpPr>
-        <p:spPr/>
-        <p:txBody>
-          <a:bodyPr/>
-          <a:lstStyle/>
-          <a:p>
-            <a:r>
-              <a:rPr lang="fr-FR" dirty="0"/>
-              <a:t>Cout de fonctionnement estimé</a:t>
-            </a:r>
-          </a:p>
-          <a:p>
-            <a:pPr lvl="1"/>
-            <a:r>
-              <a:rPr lang="fr-FR" dirty="0"/>
-              <a:t>Entre 2 et 5 milliards $ par an</a:t>
-            </a:r>
-          </a:p>
-          <a:p>
-            <a:pPr lvl="1"/>
-            <a:r>
-              <a:rPr lang="fr-FR" dirty="0"/>
-              <a:t>Chiffre d'affaires 2024 : Environ  5 milliards $</a:t>
-            </a:r>
-          </a:p>
-          <a:p>
-            <a:pPr lvl="1"/>
-            <a:r>
-              <a:rPr lang="fr-FR" dirty="0"/>
-              <a:t>Projection 2025 : 10 Milliards ?</a:t>
-            </a:r>
-          </a:p>
-        </p:txBody>
-      </p:sp>
-    </p:spTree>
-    <p:extLst>
-      <p:ext uri="{BB962C8B-B14F-4D97-AF65-F5344CB8AC3E}">
-        <p14:creationId xmlns:p14="http://schemas.microsoft.com/office/powerpoint/2010/main" val="3345991631"/>
-      </p:ext>
-    </p:extLst>
-  </p:cSld>
-  <p:clrMapOvr>
-    <a:masterClrMapping/>
-  </p:clrMapOvr>
-</p:sld>
-</file>
-
 <file path=ppt/slides/slide43.xml><?xml version="1.0" encoding="utf-8"?>
 <p:sld xmlns:a="http://schemas.openxmlformats.org/drawingml/2006/main" xmlns:r="http://schemas.openxmlformats.org/officeDocument/2006/relationships" xmlns:p="http://schemas.openxmlformats.org/presentationml/2006/main">
   <p:cSld>
@@ -9799,6 +9820,114 @@
           <p:cNvPr id="2" name="Titre 1">
             <a:extLst>
               <a:ext uri="{FF2B5EF4-FFF2-40B4-BE49-F238E27FC236}">
+                <a16:creationId xmlns:a16="http://schemas.microsoft.com/office/drawing/2014/main" id="{0CBC48DB-4917-4000-6ADE-9BDFFAA5C311}"/>
+              </a:ext>
+            </a:extLst>
+          </p:cNvPr>
+          <p:cNvSpPr>
+            <a:spLocks noGrp="1"/>
+          </p:cNvSpPr>
+          <p:nvPr>
+            <p:ph type="title"/>
+          </p:nvPr>
+        </p:nvSpPr>
+        <p:spPr/>
+        <p:txBody>
+          <a:bodyPr/>
+          <a:lstStyle/>
+          <a:p>
+            <a:r>
+              <a:rPr lang="fr-FR" dirty="0" err="1"/>
+              <a:t>ChatGPT</a:t>
+            </a:r>
+            <a:endParaRPr lang="fr-FR" dirty="0"/>
+          </a:p>
+        </p:txBody>
+      </p:sp>
+      <p:sp>
+        <p:nvSpPr>
+          <p:cNvPr id="3" name="Espace réservé du contenu 2">
+            <a:extLst>
+              <a:ext uri="{FF2B5EF4-FFF2-40B4-BE49-F238E27FC236}">
+                <a16:creationId xmlns:a16="http://schemas.microsoft.com/office/drawing/2014/main" id="{2E9810CD-A28D-E5EA-5316-565B2D1E93BA}"/>
+              </a:ext>
+            </a:extLst>
+          </p:cNvPr>
+          <p:cNvSpPr>
+            <a:spLocks noGrp="1"/>
+          </p:cNvSpPr>
+          <p:nvPr>
+            <p:ph idx="1"/>
+          </p:nvPr>
+        </p:nvSpPr>
+        <p:spPr/>
+        <p:txBody>
+          <a:bodyPr/>
+          <a:lstStyle/>
+          <a:p>
+            <a:r>
+              <a:rPr lang="fr-FR" dirty="0"/>
+              <a:t>Cout de fonctionnement estimé</a:t>
+            </a:r>
+          </a:p>
+          <a:p>
+            <a:pPr lvl="1"/>
+            <a:r>
+              <a:rPr lang="fr-FR" dirty="0"/>
+              <a:t>Entre 2 et 5 milliards $ par an</a:t>
+            </a:r>
+          </a:p>
+          <a:p>
+            <a:pPr lvl="1"/>
+            <a:r>
+              <a:rPr lang="fr-FR" dirty="0"/>
+              <a:t>Chiffre d'affaires 2024 : Environ  5 milliards $</a:t>
+            </a:r>
+          </a:p>
+          <a:p>
+            <a:pPr lvl="1"/>
+            <a:r>
+              <a:rPr lang="fr-FR" dirty="0"/>
+              <a:t>Projection 2025 : 10 Milliards ?</a:t>
+            </a:r>
+          </a:p>
+        </p:txBody>
+      </p:sp>
+    </p:spTree>
+    <p:extLst>
+      <p:ext uri="{BB962C8B-B14F-4D97-AF65-F5344CB8AC3E}">
+        <p14:creationId xmlns:p14="http://schemas.microsoft.com/office/powerpoint/2010/main" val="3345991631"/>
+      </p:ext>
+    </p:extLst>
+  </p:cSld>
+  <p:clrMapOvr>
+    <a:masterClrMapping/>
+  </p:clrMapOvr>
+</p:sld>
+</file>
+
+<file path=ppt/slides/slide44.xml><?xml version="1.0" encoding="utf-8"?>
+<p:sld xmlns:a="http://schemas.openxmlformats.org/drawingml/2006/main" xmlns:r="http://schemas.openxmlformats.org/officeDocument/2006/relationships" xmlns:p="http://schemas.openxmlformats.org/presentationml/2006/main">
+  <p:cSld>
+    <p:spTree>
+      <p:nvGrpSpPr>
+        <p:cNvPr id="1" name=""/>
+        <p:cNvGrpSpPr/>
+        <p:nvPr/>
+      </p:nvGrpSpPr>
+      <p:grpSpPr>
+        <a:xfrm>
+          <a:off x="0" y="0"/>
+          <a:ext cx="0" cy="0"/>
+          <a:chOff x="0" y="0"/>
+          <a:chExt cx="0" cy="0"/>
+        </a:xfrm>
+      </p:grpSpPr>
+      <p:sp>
+        <p:nvSpPr>
+          <p:cNvPr id="2" name="Titre 1">
+            <a:extLst>
+              <a:ext uri="{FF2B5EF4-FFF2-40B4-BE49-F238E27FC236}">
                 <a16:creationId xmlns:a16="http://schemas.microsoft.com/office/drawing/2014/main" id="{38240BD2-CA80-7EC8-9A58-1435C4138B74}"/>
               </a:ext>
             </a:extLst>
@@ -9885,12 +10014,8 @@
           <a:p>
             <a:pPr lvl="1"/>
             <a:r>
-              <a:rPr lang="fr-FR" sz="2000"/>
-              <a:t>Solution </a:t>
-            </a:r>
-            <a:r>
               <a:rPr lang="fr-FR" sz="2000" dirty="0"/>
-              <a:t>tiers : n8n, make.com, …</a:t>
+              <a:t>Solution tiers : n8n, make.com, …</a:t>
             </a:r>
           </a:p>
           <a:p>
@@ -10028,7 +10153,7 @@
             <a:pPr lvl="1"/>
             <a:r>
               <a:rPr lang="fr-FR" dirty="0"/>
-              <a:t>Python, R</a:t>
+              <a:t>Python</a:t>
             </a:r>
           </a:p>
           <a:p>
